--- a/docs/pptx/whole/ritu-linsubhr-ratio-aki2_10pct.pptx
+++ b/docs/pptx/whole/ritu-linsubhr-ratio-aki2_10pct.pptx
@@ -2443,7 +2443,7 @@
           </p:nvSpPr>
           <p:spPr>
             <a:xfrm>
-              <a:off x="955490" y="2073503"/>
+              <a:off x="957589" y="2073503"/>
               <a:ext cx="0" cy="3649639"/>
             </a:xfrm>
             <a:custGeom>
@@ -2486,7 +2486,7 @@
           </p:nvSpPr>
           <p:spPr>
             <a:xfrm>
-              <a:off x="1892768" y="2073503"/>
+              <a:off x="1893867" y="2073503"/>
               <a:ext cx="0" cy="3649639"/>
             </a:xfrm>
             <a:custGeom>
@@ -2529,7 +2529,7 @@
           </p:nvSpPr>
           <p:spPr>
             <a:xfrm>
-              <a:off x="2830046" y="2073503"/>
+              <a:off x="2830144" y="2073503"/>
               <a:ext cx="0" cy="3649639"/>
             </a:xfrm>
             <a:custGeom>
@@ -2572,7 +2572,7 @@
           </p:nvSpPr>
           <p:spPr>
             <a:xfrm>
-              <a:off x="3767323" y="2073503"/>
+              <a:off x="3766422" y="2073503"/>
               <a:ext cx="0" cy="3649639"/>
             </a:xfrm>
             <a:custGeom>
@@ -2615,7 +2615,7 @@
           </p:nvSpPr>
           <p:spPr>
             <a:xfrm>
-              <a:off x="4704601" y="2073503"/>
+              <a:off x="4702700" y="2073503"/>
               <a:ext cx="0" cy="3649639"/>
             </a:xfrm>
             <a:custGeom>
@@ -2658,7 +2658,7 @@
           </p:nvSpPr>
           <p:spPr>
             <a:xfrm>
-              <a:off x="5641878" y="2073503"/>
+              <a:off x="5638978" y="2073503"/>
               <a:ext cx="0" cy="3649639"/>
             </a:xfrm>
             <a:custGeom>
@@ -2701,7 +2701,7 @@
           </p:nvSpPr>
           <p:spPr>
             <a:xfrm>
-              <a:off x="6579156" y="2073503"/>
+              <a:off x="6575256" y="2073503"/>
               <a:ext cx="0" cy="3649639"/>
             </a:xfrm>
             <a:custGeom>
@@ -2744,7 +2744,7 @@
           </p:nvSpPr>
           <p:spPr>
             <a:xfrm>
-              <a:off x="7516433" y="2073503"/>
+              <a:off x="7511534" y="2073503"/>
               <a:ext cx="0" cy="3649639"/>
             </a:xfrm>
             <a:custGeom>
@@ -2787,7 +2787,7 @@
           </p:nvSpPr>
           <p:spPr>
             <a:xfrm>
-              <a:off x="8453711" y="2073503"/>
+              <a:off x="8447812" y="2073503"/>
               <a:ext cx="0" cy="3649639"/>
             </a:xfrm>
             <a:custGeom>
@@ -3045,7 +3045,7 @@
           </p:nvSpPr>
           <p:spPr>
             <a:xfrm>
-              <a:off x="1424129" y="2073503"/>
+              <a:off x="1425728" y="2073503"/>
               <a:ext cx="0" cy="3649639"/>
             </a:xfrm>
             <a:custGeom>
@@ -3088,7 +3088,7 @@
           </p:nvSpPr>
           <p:spPr>
             <a:xfrm>
-              <a:off x="2361407" y="2073503"/>
+              <a:off x="2362006" y="2073503"/>
               <a:ext cx="0" cy="3649639"/>
             </a:xfrm>
             <a:custGeom>
@@ -3131,7 +3131,7 @@
           </p:nvSpPr>
           <p:spPr>
             <a:xfrm>
-              <a:off x="3298684" y="2073503"/>
+              <a:off x="3298283" y="2073503"/>
               <a:ext cx="0" cy="3649639"/>
             </a:xfrm>
             <a:custGeom>
@@ -3174,7 +3174,7 @@
           </p:nvSpPr>
           <p:spPr>
             <a:xfrm>
-              <a:off x="4235962" y="2073503"/>
+              <a:off x="4234561" y="2073503"/>
               <a:ext cx="0" cy="3649639"/>
             </a:xfrm>
             <a:custGeom>
@@ -3217,7 +3217,7 @@
           </p:nvSpPr>
           <p:spPr>
             <a:xfrm>
-              <a:off x="5173239" y="2073503"/>
+              <a:off x="5170839" y="2073503"/>
               <a:ext cx="0" cy="3649639"/>
             </a:xfrm>
             <a:custGeom>
@@ -3260,7 +3260,7 @@
           </p:nvSpPr>
           <p:spPr>
             <a:xfrm>
-              <a:off x="6110517" y="2073503"/>
+              <a:off x="6107117" y="2073503"/>
               <a:ext cx="0" cy="3649639"/>
             </a:xfrm>
             <a:custGeom>
@@ -3303,7 +3303,7 @@
           </p:nvSpPr>
           <p:spPr>
             <a:xfrm>
-              <a:off x="7047795" y="2073503"/>
+              <a:off x="7043395" y="2073503"/>
               <a:ext cx="0" cy="3649639"/>
             </a:xfrm>
             <a:custGeom>
@@ -3346,7 +3346,7 @@
           </p:nvSpPr>
           <p:spPr>
             <a:xfrm>
-              <a:off x="7985072" y="2073503"/>
+              <a:off x="7979673" y="2073503"/>
               <a:ext cx="0" cy="3649639"/>
             </a:xfrm>
             <a:custGeom>
@@ -3390,539 +3390,539 @@
           <p:spPr>
             <a:xfrm>
               <a:off x="1172049" y="2073503"/>
-              <a:ext cx="7090630" cy="3471067"/>
+              <a:ext cx="7090630" cy="3470707"/>
             </a:xfrm>
             <a:custGeom>
               <a:avLst/>
               <a:pathLst>
-                <a:path w="7090630" h="3471067">
+                <a:path w="7090630" h="3470707">
                   <a:moveTo>
-                    <a:pt x="1786256" y="0"/>
+                    <a:pt x="1777695" y="0"/>
                   </a:moveTo>
                   <a:lnTo>
-                    <a:pt x="1790563" y="16424"/>
-                  </a:lnTo>
-                  <a:lnTo>
-                    <a:pt x="1862185" y="269620"/>
-                  </a:lnTo>
-                  <a:lnTo>
-                    <a:pt x="1933808" y="504326"/>
-                  </a:lnTo>
-                  <a:lnTo>
-                    <a:pt x="2005430" y="721893"/>
-                  </a:lnTo>
-                  <a:lnTo>
-                    <a:pt x="2077053" y="923573"/>
-                  </a:lnTo>
-                  <a:lnTo>
-                    <a:pt x="2148675" y="1110526"/>
-                  </a:lnTo>
-                  <a:lnTo>
-                    <a:pt x="2220298" y="1283826"/>
-                  </a:lnTo>
-                  <a:lnTo>
-                    <a:pt x="2291920" y="1444472"/>
-                  </a:lnTo>
-                  <a:lnTo>
-                    <a:pt x="2363543" y="1593386"/>
-                  </a:lnTo>
-                  <a:lnTo>
-                    <a:pt x="2435165" y="1731427"/>
-                  </a:lnTo>
-                  <a:lnTo>
-                    <a:pt x="2506788" y="1859387"/>
-                  </a:lnTo>
-                  <a:lnTo>
-                    <a:pt x="2578410" y="1978003"/>
-                  </a:lnTo>
-                  <a:lnTo>
-                    <a:pt x="2650033" y="2087958"/>
-                  </a:lnTo>
-                  <a:lnTo>
-                    <a:pt x="2721655" y="2189883"/>
-                  </a:lnTo>
-                  <a:lnTo>
-                    <a:pt x="2793278" y="2284365"/>
-                  </a:lnTo>
-                  <a:lnTo>
-                    <a:pt x="2864901" y="2371948"/>
-                  </a:lnTo>
-                  <a:lnTo>
-                    <a:pt x="2936523" y="2453135"/>
-                  </a:lnTo>
-                  <a:lnTo>
-                    <a:pt x="3008146" y="2528394"/>
-                  </a:lnTo>
-                  <a:lnTo>
-                    <a:pt x="3079768" y="2598157"/>
-                  </a:lnTo>
-                  <a:lnTo>
-                    <a:pt x="3151391" y="2655782"/>
-                  </a:lnTo>
-                  <a:lnTo>
-                    <a:pt x="3223013" y="2666678"/>
-                  </a:lnTo>
-                  <a:lnTo>
-                    <a:pt x="3294636" y="2677430"/>
-                  </a:lnTo>
-                  <a:lnTo>
-                    <a:pt x="3366258" y="2688041"/>
-                  </a:lnTo>
-                  <a:lnTo>
-                    <a:pt x="3437881" y="2698513"/>
-                  </a:lnTo>
-                  <a:lnTo>
-                    <a:pt x="3509503" y="2708846"/>
-                  </a:lnTo>
-                  <a:lnTo>
-                    <a:pt x="3581126" y="2719044"/>
-                  </a:lnTo>
-                  <a:lnTo>
-                    <a:pt x="3652748" y="2729107"/>
-                  </a:lnTo>
-                  <a:lnTo>
-                    <a:pt x="3724371" y="2739038"/>
-                  </a:lnTo>
-                  <a:lnTo>
-                    <a:pt x="3795993" y="2748838"/>
-                  </a:lnTo>
-                  <a:lnTo>
-                    <a:pt x="3867616" y="2758510"/>
-                  </a:lnTo>
-                  <a:lnTo>
-                    <a:pt x="3939238" y="2768054"/>
-                  </a:lnTo>
-                  <a:lnTo>
-                    <a:pt x="4010861" y="2777472"/>
-                  </a:lnTo>
-                  <a:lnTo>
-                    <a:pt x="4082483" y="2786767"/>
-                  </a:lnTo>
-                  <a:lnTo>
-                    <a:pt x="4154106" y="2795939"/>
-                  </a:lnTo>
-                  <a:lnTo>
-                    <a:pt x="4225729" y="2804990"/>
-                  </a:lnTo>
-                  <a:lnTo>
-                    <a:pt x="4297351" y="2813922"/>
-                  </a:lnTo>
-                  <a:lnTo>
-                    <a:pt x="4368974" y="2822737"/>
-                  </a:lnTo>
-                  <a:lnTo>
-                    <a:pt x="4440596" y="2831436"/>
-                  </a:lnTo>
-                  <a:lnTo>
-                    <a:pt x="4512219" y="2840020"/>
-                  </a:lnTo>
-                  <a:lnTo>
-                    <a:pt x="4583841" y="2848492"/>
-                  </a:lnTo>
-                  <a:lnTo>
-                    <a:pt x="4655464" y="2856852"/>
-                  </a:lnTo>
-                  <a:lnTo>
-                    <a:pt x="4727086" y="2865101"/>
-                  </a:lnTo>
-                  <a:lnTo>
-                    <a:pt x="4798709" y="2873243"/>
-                  </a:lnTo>
-                  <a:lnTo>
-                    <a:pt x="4870331" y="2881277"/>
-                  </a:lnTo>
-                  <a:lnTo>
-                    <a:pt x="4941954" y="2889205"/>
-                  </a:lnTo>
-                  <a:lnTo>
-                    <a:pt x="5013576" y="2897029"/>
-                  </a:lnTo>
-                  <a:lnTo>
-                    <a:pt x="5085199" y="2904750"/>
-                  </a:lnTo>
-                  <a:lnTo>
-                    <a:pt x="5156821" y="2912370"/>
-                  </a:lnTo>
-                  <a:lnTo>
-                    <a:pt x="5228444" y="2919889"/>
-                  </a:lnTo>
-                  <a:lnTo>
-                    <a:pt x="5300066" y="2927310"/>
-                  </a:lnTo>
-                  <a:lnTo>
-                    <a:pt x="5371689" y="2934632"/>
-                  </a:lnTo>
-                  <a:lnTo>
-                    <a:pt x="5443311" y="2941858"/>
-                  </a:lnTo>
-                  <a:lnTo>
-                    <a:pt x="5514934" y="2948990"/>
-                  </a:lnTo>
-                  <a:lnTo>
-                    <a:pt x="5586557" y="2956027"/>
-                  </a:lnTo>
-                  <a:lnTo>
-                    <a:pt x="5658179" y="2962972"/>
-                  </a:lnTo>
-                  <a:lnTo>
-                    <a:pt x="5729802" y="2969825"/>
-                  </a:lnTo>
-                  <a:lnTo>
-                    <a:pt x="5801424" y="2976588"/>
-                  </a:lnTo>
-                  <a:lnTo>
-                    <a:pt x="5873047" y="2983262"/>
-                  </a:lnTo>
-                  <a:lnTo>
-                    <a:pt x="5944669" y="2989849"/>
-                  </a:lnTo>
-                  <a:lnTo>
-                    <a:pt x="6016292" y="2996348"/>
-                  </a:lnTo>
-                  <a:lnTo>
-                    <a:pt x="6087914" y="3002762"/>
-                  </a:lnTo>
-                  <a:lnTo>
-                    <a:pt x="6159537" y="3009092"/>
-                  </a:lnTo>
-                  <a:lnTo>
-                    <a:pt x="6231159" y="3015338"/>
-                  </a:lnTo>
-                  <a:lnTo>
-                    <a:pt x="6302782" y="3021503"/>
-                  </a:lnTo>
-                  <a:lnTo>
-                    <a:pt x="6374404" y="3027586"/>
-                  </a:lnTo>
-                  <a:lnTo>
-                    <a:pt x="6446027" y="3033589"/>
-                  </a:lnTo>
-                  <a:lnTo>
-                    <a:pt x="6517649" y="3039513"/>
-                  </a:lnTo>
-                  <a:lnTo>
-                    <a:pt x="6589272" y="3045359"/>
-                  </a:lnTo>
-                  <a:lnTo>
-                    <a:pt x="6660894" y="3051128"/>
-                  </a:lnTo>
-                  <a:lnTo>
-                    <a:pt x="6732517" y="3056821"/>
-                  </a:lnTo>
-                  <a:lnTo>
-                    <a:pt x="6804139" y="3062439"/>
-                  </a:lnTo>
-                  <a:lnTo>
-                    <a:pt x="6875762" y="3067984"/>
-                  </a:lnTo>
-                  <a:lnTo>
-                    <a:pt x="6947385" y="3073455"/>
-                  </a:lnTo>
-                  <a:lnTo>
-                    <a:pt x="7019007" y="3078854"/>
-                  </a:lnTo>
-                  <a:lnTo>
-                    <a:pt x="7090630" y="3084183"/>
-                  </a:lnTo>
-                  <a:lnTo>
-                    <a:pt x="7090630" y="3471067"/>
-                  </a:lnTo>
-                  <a:lnTo>
-                    <a:pt x="7019007" y="3470069"/>
-                  </a:lnTo>
-                  <a:lnTo>
-                    <a:pt x="6947385" y="3468991"/>
-                  </a:lnTo>
-                  <a:lnTo>
-                    <a:pt x="6875762" y="3467829"/>
-                  </a:lnTo>
-                  <a:lnTo>
-                    <a:pt x="6804139" y="3466575"/>
-                  </a:lnTo>
-                  <a:lnTo>
-                    <a:pt x="6732517" y="3465222"/>
-                  </a:lnTo>
-                  <a:lnTo>
-                    <a:pt x="6660894" y="3463763"/>
-                  </a:lnTo>
-                  <a:lnTo>
-                    <a:pt x="6589272" y="3462189"/>
-                  </a:lnTo>
-                  <a:lnTo>
-                    <a:pt x="6517649" y="3460490"/>
-                  </a:lnTo>
-                  <a:lnTo>
-                    <a:pt x="6446027" y="3458658"/>
-                  </a:lnTo>
-                  <a:lnTo>
-                    <a:pt x="6374404" y="3456682"/>
-                  </a:lnTo>
-                  <a:lnTo>
-                    <a:pt x="6302782" y="3454550"/>
-                  </a:lnTo>
-                  <a:lnTo>
-                    <a:pt x="6231159" y="3452250"/>
-                  </a:lnTo>
-                  <a:lnTo>
-                    <a:pt x="6159537" y="3449769"/>
-                  </a:lnTo>
-                  <a:lnTo>
-                    <a:pt x="6087914" y="3447092"/>
-                  </a:lnTo>
-                  <a:lnTo>
-                    <a:pt x="6016292" y="3444205"/>
-                  </a:lnTo>
-                  <a:lnTo>
-                    <a:pt x="5944669" y="3441090"/>
-                  </a:lnTo>
-                  <a:lnTo>
-                    <a:pt x="5873047" y="3437730"/>
-                  </a:lnTo>
-                  <a:lnTo>
-                    <a:pt x="5801424" y="3434105"/>
-                  </a:lnTo>
-                  <a:lnTo>
-                    <a:pt x="5729802" y="3430194"/>
-                  </a:lnTo>
-                  <a:lnTo>
-                    <a:pt x="5658179" y="3425976"/>
-                  </a:lnTo>
-                  <a:lnTo>
-                    <a:pt x="5586557" y="3421425"/>
-                  </a:lnTo>
-                  <a:lnTo>
-                    <a:pt x="5514934" y="3416515"/>
-                  </a:lnTo>
-                  <a:lnTo>
-                    <a:pt x="5443311" y="3411219"/>
-                  </a:lnTo>
-                  <a:lnTo>
-                    <a:pt x="5371689" y="3405506"/>
-                  </a:lnTo>
-                  <a:lnTo>
-                    <a:pt x="5300066" y="3399342"/>
-                  </a:lnTo>
-                  <a:lnTo>
-                    <a:pt x="5228444" y="3392693"/>
-                  </a:lnTo>
-                  <a:lnTo>
-                    <a:pt x="5156821" y="3385520"/>
-                  </a:lnTo>
-                  <a:lnTo>
-                    <a:pt x="5085199" y="3377782"/>
-                  </a:lnTo>
-                  <a:lnTo>
-                    <a:pt x="5013576" y="3369435"/>
-                  </a:lnTo>
-                  <a:lnTo>
-                    <a:pt x="4941954" y="3360430"/>
-                  </a:lnTo>
-                  <a:lnTo>
-                    <a:pt x="4870331" y="3350716"/>
-                  </a:lnTo>
-                  <a:lnTo>
-                    <a:pt x="4798709" y="3340236"/>
-                  </a:lnTo>
-                  <a:lnTo>
-                    <a:pt x="4727086" y="3328931"/>
-                  </a:lnTo>
-                  <a:lnTo>
-                    <a:pt x="4655464" y="3316735"/>
-                  </a:lnTo>
-                  <a:lnTo>
-                    <a:pt x="4583841" y="3303579"/>
-                  </a:lnTo>
-                  <a:lnTo>
-                    <a:pt x="4512219" y="3289386"/>
-                  </a:lnTo>
-                  <a:lnTo>
-                    <a:pt x="4440596" y="3274075"/>
-                  </a:lnTo>
-                  <a:lnTo>
-                    <a:pt x="4368974" y="3257558"/>
-                  </a:lnTo>
-                  <a:lnTo>
-                    <a:pt x="4297351" y="3239740"/>
-                  </a:lnTo>
-                  <a:lnTo>
-                    <a:pt x="4225729" y="3220518"/>
-                  </a:lnTo>
-                  <a:lnTo>
-                    <a:pt x="4154106" y="3199782"/>
-                  </a:lnTo>
-                  <a:lnTo>
-                    <a:pt x="4082483" y="3177412"/>
-                  </a:lnTo>
-                  <a:lnTo>
-                    <a:pt x="4010861" y="3153280"/>
-                  </a:lnTo>
-                  <a:lnTo>
-                    <a:pt x="3939238" y="3127248"/>
-                  </a:lnTo>
-                  <a:lnTo>
-                    <a:pt x="3867616" y="3099164"/>
-                  </a:lnTo>
-                  <a:lnTo>
-                    <a:pt x="3795993" y="3068868"/>
-                  </a:lnTo>
-                  <a:lnTo>
-                    <a:pt x="3724371" y="3036186"/>
-                  </a:lnTo>
-                  <a:lnTo>
-                    <a:pt x="3652748" y="3000929"/>
-                  </a:lnTo>
-                  <a:lnTo>
-                    <a:pt x="3581126" y="2962895"/>
-                  </a:lnTo>
-                  <a:lnTo>
-                    <a:pt x="3509503" y="2921864"/>
-                  </a:lnTo>
-                  <a:lnTo>
-                    <a:pt x="3437881" y="2877602"/>
-                  </a:lnTo>
-                  <a:lnTo>
-                    <a:pt x="3366258" y="2829852"/>
-                  </a:lnTo>
-                  <a:lnTo>
-                    <a:pt x="3294636" y="2778341"/>
-                  </a:lnTo>
-                  <a:lnTo>
-                    <a:pt x="3223013" y="2722772"/>
-                  </a:lnTo>
-                  <a:lnTo>
-                    <a:pt x="3151391" y="2662826"/>
-                  </a:lnTo>
-                  <a:lnTo>
-                    <a:pt x="3079768" y="2644741"/>
-                  </a:lnTo>
-                  <a:lnTo>
-                    <a:pt x="3008146" y="2633552"/>
-                  </a:lnTo>
-                  <a:lnTo>
-                    <a:pt x="2936523" y="2622214"/>
-                  </a:lnTo>
-                  <a:lnTo>
-                    <a:pt x="2864901" y="2610726"/>
-                  </a:lnTo>
-                  <a:lnTo>
-                    <a:pt x="2793278" y="2599084"/>
-                  </a:lnTo>
-                  <a:lnTo>
-                    <a:pt x="2721655" y="2587286"/>
-                  </a:lnTo>
-                  <a:lnTo>
-                    <a:pt x="2650033" y="2575332"/>
-                  </a:lnTo>
-                  <a:lnTo>
-                    <a:pt x="2578410" y="2563218"/>
-                  </a:lnTo>
-                  <a:lnTo>
-                    <a:pt x="2506788" y="2550942"/>
-                  </a:lnTo>
-                  <a:lnTo>
-                    <a:pt x="2435165" y="2538503"/>
-                  </a:lnTo>
-                  <a:lnTo>
-                    <a:pt x="2363543" y="2525898"/>
-                  </a:lnTo>
-                  <a:lnTo>
-                    <a:pt x="2291920" y="2513124"/>
-                  </a:lnTo>
-                  <a:lnTo>
-                    <a:pt x="2220298" y="2500181"/>
-                  </a:lnTo>
-                  <a:lnTo>
-                    <a:pt x="2148675" y="2487064"/>
-                  </a:lnTo>
-                  <a:lnTo>
-                    <a:pt x="2077053" y="2473773"/>
-                  </a:lnTo>
-                  <a:lnTo>
-                    <a:pt x="2005430" y="2460305"/>
-                  </a:lnTo>
-                  <a:lnTo>
-                    <a:pt x="1933808" y="2446657"/>
-                  </a:lnTo>
-                  <a:lnTo>
-                    <a:pt x="1862185" y="2432827"/>
-                  </a:lnTo>
-                  <a:lnTo>
-                    <a:pt x="1790563" y="2418813"/>
-                  </a:lnTo>
-                  <a:lnTo>
-                    <a:pt x="1718940" y="2404611"/>
-                  </a:lnTo>
-                  <a:lnTo>
-                    <a:pt x="1647318" y="2390221"/>
-                  </a:lnTo>
-                  <a:lnTo>
-                    <a:pt x="1575695" y="2375638"/>
-                  </a:lnTo>
-                  <a:lnTo>
-                    <a:pt x="1504073" y="2360861"/>
-                  </a:lnTo>
-                  <a:lnTo>
-                    <a:pt x="1432450" y="2345887"/>
-                  </a:lnTo>
-                  <a:lnTo>
-                    <a:pt x="1360827" y="2330713"/>
-                  </a:lnTo>
-                  <a:lnTo>
-                    <a:pt x="1289205" y="2315337"/>
-                  </a:lnTo>
-                  <a:lnTo>
-                    <a:pt x="1217582" y="2299756"/>
-                  </a:lnTo>
-                  <a:lnTo>
-                    <a:pt x="1145960" y="2283967"/>
-                  </a:lnTo>
-                  <a:lnTo>
-                    <a:pt x="1074337" y="2267968"/>
-                  </a:lnTo>
-                  <a:lnTo>
-                    <a:pt x="1002715" y="2251755"/>
-                  </a:lnTo>
-                  <a:lnTo>
-                    <a:pt x="931092" y="2235326"/>
-                  </a:lnTo>
-                  <a:lnTo>
-                    <a:pt x="859470" y="2218678"/>
-                  </a:lnTo>
-                  <a:lnTo>
-                    <a:pt x="787847" y="2201808"/>
-                  </a:lnTo>
-                  <a:lnTo>
-                    <a:pt x="716225" y="2184712"/>
-                  </a:lnTo>
-                  <a:lnTo>
-                    <a:pt x="644602" y="2167389"/>
-                  </a:lnTo>
-                  <a:lnTo>
-                    <a:pt x="572980" y="2149835"/>
-                  </a:lnTo>
-                  <a:lnTo>
-                    <a:pt x="501357" y="2132047"/>
-                  </a:lnTo>
-                  <a:lnTo>
-                    <a:pt x="429735" y="2114022"/>
-                  </a:lnTo>
-                  <a:lnTo>
-                    <a:pt x="358112" y="2095756"/>
-                  </a:lnTo>
-                  <a:lnTo>
-                    <a:pt x="286490" y="2077247"/>
-                  </a:lnTo>
-                  <a:lnTo>
-                    <a:pt x="214867" y="2058490"/>
-                  </a:lnTo>
-                  <a:lnTo>
-                    <a:pt x="143245" y="2039484"/>
-                  </a:lnTo>
-                  <a:lnTo>
-                    <a:pt x="71622" y="2020224"/>
-                  </a:lnTo>
-                  <a:lnTo>
-                    <a:pt x="0" y="2000708"/>
+                    <a:pt x="1790563" y="48285"/>
+                  </a:lnTo>
+                  <a:lnTo>
+                    <a:pt x="1862185" y="297550"/>
+                  </a:lnTo>
+                  <a:lnTo>
+                    <a:pt x="1933808" y="528729"/>
+                  </a:lnTo>
+                  <a:lnTo>
+                    <a:pt x="2005430" y="743135"/>
+                  </a:lnTo>
+                  <a:lnTo>
+                    <a:pt x="2077053" y="941984"/>
+                  </a:lnTo>
+                  <a:lnTo>
+                    <a:pt x="2148675" y="1126406"/>
+                  </a:lnTo>
+                  <a:lnTo>
+                    <a:pt x="2220298" y="1297446"/>
+                  </a:lnTo>
+                  <a:lnTo>
+                    <a:pt x="2291920" y="1456077"/>
+                  </a:lnTo>
+                  <a:lnTo>
+                    <a:pt x="2363543" y="1603197"/>
+                  </a:lnTo>
+                  <a:lnTo>
+                    <a:pt x="2435165" y="1739643"/>
+                  </a:lnTo>
+                  <a:lnTo>
+                    <a:pt x="2506788" y="1866189"/>
+                  </a:lnTo>
+                  <a:lnTo>
+                    <a:pt x="2578410" y="1983554"/>
+                  </a:lnTo>
+                  <a:lnTo>
+                    <a:pt x="2650033" y="2092403"/>
+                  </a:lnTo>
+                  <a:lnTo>
+                    <a:pt x="2721655" y="2193354"/>
+                  </a:lnTo>
+                  <a:lnTo>
+                    <a:pt x="2793278" y="2286980"/>
+                  </a:lnTo>
+                  <a:lnTo>
+                    <a:pt x="2864901" y="2373813"/>
+                  </a:lnTo>
+                  <a:lnTo>
+                    <a:pt x="2936523" y="2454346"/>
+                  </a:lnTo>
+                  <a:lnTo>
+                    <a:pt x="3008146" y="2529036"/>
+                  </a:lnTo>
+                  <a:lnTo>
+                    <a:pt x="3079768" y="2598306"/>
+                  </a:lnTo>
+                  <a:lnTo>
+                    <a:pt x="3151391" y="2655738"/>
+                  </a:lnTo>
+                  <a:lnTo>
+                    <a:pt x="3223013" y="2666595"/>
+                  </a:lnTo>
+                  <a:lnTo>
+                    <a:pt x="3294636" y="2677311"/>
+                  </a:lnTo>
+                  <a:lnTo>
+                    <a:pt x="3366258" y="2687886"/>
+                  </a:lnTo>
+                  <a:lnTo>
+                    <a:pt x="3437881" y="2698322"/>
+                  </a:lnTo>
+                  <a:lnTo>
+                    <a:pt x="3509503" y="2708621"/>
+                  </a:lnTo>
+                  <a:lnTo>
+                    <a:pt x="3581126" y="2718785"/>
+                  </a:lnTo>
+                  <a:lnTo>
+                    <a:pt x="3652748" y="2728816"/>
+                  </a:lnTo>
+                  <a:lnTo>
+                    <a:pt x="3724371" y="2738716"/>
+                  </a:lnTo>
+                  <a:lnTo>
+                    <a:pt x="3795993" y="2748485"/>
+                  </a:lnTo>
+                  <a:lnTo>
+                    <a:pt x="3867616" y="2758127"/>
+                  </a:lnTo>
+                  <a:lnTo>
+                    <a:pt x="3939238" y="2767642"/>
+                  </a:lnTo>
+                  <a:lnTo>
+                    <a:pt x="4010861" y="2777032"/>
+                  </a:lnTo>
+                  <a:lnTo>
+                    <a:pt x="4082483" y="2786299"/>
+                  </a:lnTo>
+                  <a:lnTo>
+                    <a:pt x="4154106" y="2795445"/>
+                  </a:lnTo>
+                  <a:lnTo>
+                    <a:pt x="4225729" y="2804471"/>
+                  </a:lnTo>
+                  <a:lnTo>
+                    <a:pt x="4297351" y="2813378"/>
+                  </a:lnTo>
+                  <a:lnTo>
+                    <a:pt x="4368974" y="2822169"/>
+                  </a:lnTo>
+                  <a:lnTo>
+                    <a:pt x="4440596" y="2830844"/>
+                  </a:lnTo>
+                  <a:lnTo>
+                    <a:pt x="4512219" y="2839406"/>
+                  </a:lnTo>
+                  <a:lnTo>
+                    <a:pt x="4583841" y="2847855"/>
+                  </a:lnTo>
+                  <a:lnTo>
+                    <a:pt x="4655464" y="2856193"/>
+                  </a:lnTo>
+                  <a:lnTo>
+                    <a:pt x="4727086" y="2864422"/>
+                  </a:lnTo>
+                  <a:lnTo>
+                    <a:pt x="4798709" y="2872544"/>
+                  </a:lnTo>
+                  <a:lnTo>
+                    <a:pt x="4870331" y="2880558"/>
+                  </a:lnTo>
+                  <a:lnTo>
+                    <a:pt x="4941954" y="2888468"/>
+                  </a:lnTo>
+                  <a:lnTo>
+                    <a:pt x="5013576" y="2896274"/>
+                  </a:lnTo>
+                  <a:lnTo>
+                    <a:pt x="5085199" y="2903977"/>
+                  </a:lnTo>
+                  <a:lnTo>
+                    <a:pt x="5156821" y="2911580"/>
+                  </a:lnTo>
+                  <a:lnTo>
+                    <a:pt x="5228444" y="2919083"/>
+                  </a:lnTo>
+                  <a:lnTo>
+                    <a:pt x="5300066" y="2926487"/>
+                  </a:lnTo>
+                  <a:lnTo>
+                    <a:pt x="5371689" y="2933795"/>
+                  </a:lnTo>
+                  <a:lnTo>
+                    <a:pt x="5443311" y="2941006"/>
+                  </a:lnTo>
+                  <a:lnTo>
+                    <a:pt x="5514934" y="2948123"/>
+                  </a:lnTo>
+                  <a:lnTo>
+                    <a:pt x="5586557" y="2955147"/>
+                  </a:lnTo>
+                  <a:lnTo>
+                    <a:pt x="5658179" y="2962078"/>
+                  </a:lnTo>
+                  <a:lnTo>
+                    <a:pt x="5729802" y="2968919"/>
+                  </a:lnTo>
+                  <a:lnTo>
+                    <a:pt x="5801424" y="2975670"/>
+                  </a:lnTo>
+                  <a:lnTo>
+                    <a:pt x="5873047" y="2982332"/>
+                  </a:lnTo>
+                  <a:lnTo>
+                    <a:pt x="5944669" y="2988907"/>
+                  </a:lnTo>
+                  <a:lnTo>
+                    <a:pt x="6016292" y="2995396"/>
+                  </a:lnTo>
+                  <a:lnTo>
+                    <a:pt x="6087914" y="3001800"/>
+                  </a:lnTo>
+                  <a:lnTo>
+                    <a:pt x="6159537" y="3008120"/>
+                  </a:lnTo>
+                  <a:lnTo>
+                    <a:pt x="6231159" y="3014357"/>
+                  </a:lnTo>
+                  <a:lnTo>
+                    <a:pt x="6302782" y="3020512"/>
+                  </a:lnTo>
+                  <a:lnTo>
+                    <a:pt x="6374404" y="3026586"/>
+                  </a:lnTo>
+                  <a:lnTo>
+                    <a:pt x="6446027" y="3032581"/>
+                  </a:lnTo>
+                  <a:lnTo>
+                    <a:pt x="6517649" y="3038497"/>
+                  </a:lnTo>
+                  <a:lnTo>
+                    <a:pt x="6589272" y="3044336"/>
+                  </a:lnTo>
+                  <a:lnTo>
+                    <a:pt x="6660894" y="3050098"/>
+                  </a:lnTo>
+                  <a:lnTo>
+                    <a:pt x="6732517" y="3055784"/>
+                  </a:lnTo>
+                  <a:lnTo>
+                    <a:pt x="6804139" y="3061396"/>
+                  </a:lnTo>
+                  <a:lnTo>
+                    <a:pt x="6875762" y="3066934"/>
+                  </a:lnTo>
+                  <a:lnTo>
+                    <a:pt x="6947385" y="3072400"/>
+                  </a:lnTo>
+                  <a:lnTo>
+                    <a:pt x="7019007" y="3077794"/>
+                  </a:lnTo>
+                  <a:lnTo>
+                    <a:pt x="7090630" y="3083117"/>
+                  </a:lnTo>
+                  <a:lnTo>
+                    <a:pt x="7090630" y="3470707"/>
+                  </a:lnTo>
+                  <a:lnTo>
+                    <a:pt x="7019007" y="3469687"/>
+                  </a:lnTo>
+                  <a:lnTo>
+                    <a:pt x="6947385" y="3468587"/>
+                  </a:lnTo>
+                  <a:lnTo>
+                    <a:pt x="6875762" y="3467401"/>
+                  </a:lnTo>
+                  <a:lnTo>
+                    <a:pt x="6804139" y="3466122"/>
+                  </a:lnTo>
+                  <a:lnTo>
+                    <a:pt x="6732517" y="3464744"/>
+                  </a:lnTo>
+                  <a:lnTo>
+                    <a:pt x="6660894" y="3463257"/>
+                  </a:lnTo>
+                  <a:lnTo>
+                    <a:pt x="6589272" y="3461654"/>
+                  </a:lnTo>
+                  <a:lnTo>
+                    <a:pt x="6517649" y="3459926"/>
+                  </a:lnTo>
+                  <a:lnTo>
+                    <a:pt x="6446027" y="3458062"/>
+                  </a:lnTo>
+                  <a:lnTo>
+                    <a:pt x="6374404" y="3456053"/>
+                  </a:lnTo>
+                  <a:lnTo>
+                    <a:pt x="6302782" y="3453886"/>
+                  </a:lnTo>
+                  <a:lnTo>
+                    <a:pt x="6231159" y="3451550"/>
+                  </a:lnTo>
+                  <a:lnTo>
+                    <a:pt x="6159537" y="3449031"/>
+                  </a:lnTo>
+                  <a:lnTo>
+                    <a:pt x="6087914" y="3446315"/>
+                  </a:lnTo>
+                  <a:lnTo>
+                    <a:pt x="6016292" y="3443387"/>
+                  </a:lnTo>
+                  <a:lnTo>
+                    <a:pt x="5944669" y="3440230"/>
+                  </a:lnTo>
+                  <a:lnTo>
+                    <a:pt x="5873047" y="3436825"/>
+                  </a:lnTo>
+                  <a:lnTo>
+                    <a:pt x="5801424" y="3433154"/>
+                  </a:lnTo>
+                  <a:lnTo>
+                    <a:pt x="5729802" y="3429196"/>
+                  </a:lnTo>
+                  <a:lnTo>
+                    <a:pt x="5658179" y="3424929"/>
+                  </a:lnTo>
+                  <a:lnTo>
+                    <a:pt x="5586557" y="3420327"/>
+                  </a:lnTo>
+                  <a:lnTo>
+                    <a:pt x="5514934" y="3415366"/>
+                  </a:lnTo>
+                  <a:lnTo>
+                    <a:pt x="5443311" y="3410016"/>
+                  </a:lnTo>
+                  <a:lnTo>
+                    <a:pt x="5371689" y="3404248"/>
+                  </a:lnTo>
+                  <a:lnTo>
+                    <a:pt x="5300066" y="3398029"/>
+                  </a:lnTo>
+                  <a:lnTo>
+                    <a:pt x="5228444" y="3391323"/>
+                  </a:lnTo>
+                  <a:lnTo>
+                    <a:pt x="5156821" y="3384092"/>
+                  </a:lnTo>
+                  <a:lnTo>
+                    <a:pt x="5085199" y="3376296"/>
+                  </a:lnTo>
+                  <a:lnTo>
+                    <a:pt x="5013576" y="3367890"/>
+                  </a:lnTo>
+                  <a:lnTo>
+                    <a:pt x="4941954" y="3358826"/>
+                  </a:lnTo>
+                  <a:lnTo>
+                    <a:pt x="4870331" y="3349053"/>
+                  </a:lnTo>
+                  <a:lnTo>
+                    <a:pt x="4798709" y="3338516"/>
+                  </a:lnTo>
+                  <a:lnTo>
+                    <a:pt x="4727086" y="3327154"/>
+                  </a:lnTo>
+                  <a:lnTo>
+                    <a:pt x="4655464" y="3314903"/>
+                  </a:lnTo>
+                  <a:lnTo>
+                    <a:pt x="4583841" y="3301694"/>
+                  </a:lnTo>
+                  <a:lnTo>
+                    <a:pt x="4512219" y="3287452"/>
+                  </a:lnTo>
+                  <a:lnTo>
+                    <a:pt x="4440596" y="3272095"/>
+                  </a:lnTo>
+                  <a:lnTo>
+                    <a:pt x="4368974" y="3255537"/>
+                  </a:lnTo>
+                  <a:lnTo>
+                    <a:pt x="4297351" y="3237684"/>
+                  </a:lnTo>
+                  <a:lnTo>
+                    <a:pt x="4225729" y="3218434"/>
+                  </a:lnTo>
+                  <a:lnTo>
+                    <a:pt x="4154106" y="3197677"/>
+                  </a:lnTo>
+                  <a:lnTo>
+                    <a:pt x="4082483" y="3175297"/>
+                  </a:lnTo>
+                  <a:lnTo>
+                    <a:pt x="4010861" y="3151167"/>
+                  </a:lnTo>
+                  <a:lnTo>
+                    <a:pt x="3939238" y="3125148"/>
+                  </a:lnTo>
+                  <a:lnTo>
+                    <a:pt x="3867616" y="3097094"/>
+                  </a:lnTo>
+                  <a:lnTo>
+                    <a:pt x="3795993" y="3066845"/>
+                  </a:lnTo>
+                  <a:lnTo>
+                    <a:pt x="3724371" y="3034229"/>
+                  </a:lnTo>
+                  <a:lnTo>
+                    <a:pt x="3652748" y="2999062"/>
+                  </a:lnTo>
+                  <a:lnTo>
+                    <a:pt x="3581126" y="2961144"/>
+                  </a:lnTo>
+                  <a:lnTo>
+                    <a:pt x="3509503" y="2920260"/>
+                  </a:lnTo>
+                  <a:lnTo>
+                    <a:pt x="3437881" y="2876176"/>
+                  </a:lnTo>
+                  <a:lnTo>
+                    <a:pt x="3366258" y="2828644"/>
+                  </a:lnTo>
+                  <a:lnTo>
+                    <a:pt x="3294636" y="2777394"/>
+                  </a:lnTo>
+                  <a:lnTo>
+                    <a:pt x="3223013" y="2722134"/>
+                  </a:lnTo>
+                  <a:lnTo>
+                    <a:pt x="3151391" y="2662551"/>
+                  </a:lnTo>
+                  <a:lnTo>
+                    <a:pt x="3079768" y="2644736"/>
+                  </a:lnTo>
+                  <a:lnTo>
+                    <a:pt x="3008146" y="2633588"/>
+                  </a:lnTo>
+                  <a:lnTo>
+                    <a:pt x="2936523" y="2622291"/>
+                  </a:lnTo>
+                  <a:lnTo>
+                    <a:pt x="2864901" y="2610845"/>
+                  </a:lnTo>
+                  <a:lnTo>
+                    <a:pt x="2793278" y="2599246"/>
+                  </a:lnTo>
+                  <a:lnTo>
+                    <a:pt x="2721655" y="2587494"/>
+                  </a:lnTo>
+                  <a:lnTo>
+                    <a:pt x="2650033" y="2575585"/>
+                  </a:lnTo>
+                  <a:lnTo>
+                    <a:pt x="2578410" y="2563518"/>
+                  </a:lnTo>
+                  <a:lnTo>
+                    <a:pt x="2506788" y="2551291"/>
+                  </a:lnTo>
+                  <a:lnTo>
+                    <a:pt x="2435165" y="2538901"/>
+                  </a:lnTo>
+                  <a:lnTo>
+                    <a:pt x="2363543" y="2526347"/>
+                  </a:lnTo>
+                  <a:lnTo>
+                    <a:pt x="2291920" y="2513625"/>
+                  </a:lnTo>
+                  <a:lnTo>
+                    <a:pt x="2220298" y="2500735"/>
+                  </a:lnTo>
+                  <a:lnTo>
+                    <a:pt x="2148675" y="2487673"/>
+                  </a:lnTo>
+                  <a:lnTo>
+                    <a:pt x="2077053" y="2474438"/>
+                  </a:lnTo>
+                  <a:lnTo>
+                    <a:pt x="2005430" y="2461027"/>
+                  </a:lnTo>
+                  <a:lnTo>
+                    <a:pt x="1933808" y="2447438"/>
+                  </a:lnTo>
+                  <a:lnTo>
+                    <a:pt x="1862185" y="2433669"/>
+                  </a:lnTo>
+                  <a:lnTo>
+                    <a:pt x="1790563" y="2419716"/>
+                  </a:lnTo>
+                  <a:lnTo>
+                    <a:pt x="1718940" y="2405578"/>
+                  </a:lnTo>
+                  <a:lnTo>
+                    <a:pt x="1647318" y="2391252"/>
+                  </a:lnTo>
+                  <a:lnTo>
+                    <a:pt x="1575695" y="2376736"/>
+                  </a:lnTo>
+                  <a:lnTo>
+                    <a:pt x="1504073" y="2362026"/>
+                  </a:lnTo>
+                  <a:lnTo>
+                    <a:pt x="1432450" y="2347122"/>
+                  </a:lnTo>
+                  <a:lnTo>
+                    <a:pt x="1360827" y="2332019"/>
+                  </a:lnTo>
+                  <a:lnTo>
+                    <a:pt x="1289205" y="2316716"/>
+                  </a:lnTo>
+                  <a:lnTo>
+                    <a:pt x="1217582" y="2301209"/>
+                  </a:lnTo>
+                  <a:lnTo>
+                    <a:pt x="1145960" y="2285496"/>
+                  </a:lnTo>
+                  <a:lnTo>
+                    <a:pt x="1074337" y="2269575"/>
+                  </a:lnTo>
+                  <a:lnTo>
+                    <a:pt x="1002715" y="2253442"/>
+                  </a:lnTo>
+                  <a:lnTo>
+                    <a:pt x="931092" y="2237095"/>
+                  </a:lnTo>
+                  <a:lnTo>
+                    <a:pt x="859470" y="2220530"/>
+                  </a:lnTo>
+                  <a:lnTo>
+                    <a:pt x="787847" y="2203745"/>
+                  </a:lnTo>
+                  <a:lnTo>
+                    <a:pt x="716225" y="2186737"/>
+                  </a:lnTo>
+                  <a:lnTo>
+                    <a:pt x="644602" y="2169504"/>
+                  </a:lnTo>
+                  <a:lnTo>
+                    <a:pt x="572980" y="2152041"/>
+                  </a:lnTo>
+                  <a:lnTo>
+                    <a:pt x="501357" y="2134346"/>
+                  </a:lnTo>
+                  <a:lnTo>
+                    <a:pt x="429735" y="2116416"/>
+                  </a:lnTo>
+                  <a:lnTo>
+                    <a:pt x="358112" y="2098248"/>
+                  </a:lnTo>
+                  <a:lnTo>
+                    <a:pt x="286490" y="2079839"/>
+                  </a:lnTo>
+                  <a:lnTo>
+                    <a:pt x="214867" y="2061185"/>
+                  </a:lnTo>
+                  <a:lnTo>
+                    <a:pt x="143245" y="2042283"/>
+                  </a:lnTo>
+                  <a:lnTo>
+                    <a:pt x="71622" y="2023130"/>
+                  </a:lnTo>
+                  <a:lnTo>
+                    <a:pt x="0" y="2003722"/>
                   </a:lnTo>
                   <a:close/>
                 </a:path>
@@ -3948,240 +3948,240 @@
           </p:nvSpPr>
           <p:spPr>
             <a:xfrm>
-              <a:off x="2958305" y="2073503"/>
-              <a:ext cx="5304373" cy="3084183"/>
+              <a:off x="2949745" y="2073503"/>
+              <a:ext cx="5312934" cy="3083117"/>
             </a:xfrm>
             <a:custGeom>
               <a:avLst/>
               <a:pathLst>
-                <a:path w="5304373" h="3084183">
+                <a:path w="5312934" h="3083117">
                   <a:moveTo>
                     <a:pt x="0" y="0"/>
                   </a:moveTo>
                   <a:lnTo>
-                    <a:pt x="4306" y="16424"/>
-                  </a:lnTo>
-                  <a:lnTo>
-                    <a:pt x="75929" y="269620"/>
-                  </a:lnTo>
-                  <a:lnTo>
-                    <a:pt x="147551" y="504326"/>
-                  </a:lnTo>
-                  <a:lnTo>
-                    <a:pt x="219174" y="721893"/>
-                  </a:lnTo>
-                  <a:lnTo>
-                    <a:pt x="290796" y="923573"/>
-                  </a:lnTo>
-                  <a:lnTo>
-                    <a:pt x="362419" y="1110526"/>
-                  </a:lnTo>
-                  <a:lnTo>
-                    <a:pt x="434042" y="1283826"/>
-                  </a:lnTo>
-                  <a:lnTo>
-                    <a:pt x="505664" y="1444472"/>
-                  </a:lnTo>
-                  <a:lnTo>
-                    <a:pt x="577287" y="1593386"/>
-                  </a:lnTo>
-                  <a:lnTo>
-                    <a:pt x="648909" y="1731427"/>
-                  </a:lnTo>
-                  <a:lnTo>
-                    <a:pt x="720532" y="1859387"/>
-                  </a:lnTo>
-                  <a:lnTo>
-                    <a:pt x="792154" y="1978003"/>
-                  </a:lnTo>
-                  <a:lnTo>
-                    <a:pt x="863777" y="2087958"/>
-                  </a:lnTo>
-                  <a:lnTo>
-                    <a:pt x="935399" y="2189883"/>
-                  </a:lnTo>
-                  <a:lnTo>
-                    <a:pt x="1007022" y="2284365"/>
-                  </a:lnTo>
-                  <a:lnTo>
-                    <a:pt x="1078644" y="2371948"/>
-                  </a:lnTo>
-                  <a:lnTo>
-                    <a:pt x="1150267" y="2453135"/>
-                  </a:lnTo>
-                  <a:lnTo>
-                    <a:pt x="1221889" y="2528394"/>
-                  </a:lnTo>
-                  <a:lnTo>
-                    <a:pt x="1293512" y="2598157"/>
-                  </a:lnTo>
-                  <a:lnTo>
-                    <a:pt x="1365134" y="2655782"/>
-                  </a:lnTo>
-                  <a:lnTo>
-                    <a:pt x="1436757" y="2666678"/>
-                  </a:lnTo>
-                  <a:lnTo>
-                    <a:pt x="1508379" y="2677430"/>
-                  </a:lnTo>
-                  <a:lnTo>
-                    <a:pt x="1580002" y="2688041"/>
-                  </a:lnTo>
-                  <a:lnTo>
-                    <a:pt x="1651624" y="2698513"/>
-                  </a:lnTo>
-                  <a:lnTo>
-                    <a:pt x="1723247" y="2708846"/>
-                  </a:lnTo>
-                  <a:lnTo>
-                    <a:pt x="1794870" y="2719044"/>
-                  </a:lnTo>
-                  <a:lnTo>
-                    <a:pt x="1866492" y="2729107"/>
-                  </a:lnTo>
-                  <a:lnTo>
-                    <a:pt x="1938115" y="2739038"/>
-                  </a:lnTo>
-                  <a:lnTo>
-                    <a:pt x="2009737" y="2748838"/>
-                  </a:lnTo>
-                  <a:lnTo>
-                    <a:pt x="2081360" y="2758510"/>
-                  </a:lnTo>
-                  <a:lnTo>
-                    <a:pt x="2152982" y="2768054"/>
-                  </a:lnTo>
-                  <a:lnTo>
-                    <a:pt x="2224605" y="2777472"/>
-                  </a:lnTo>
-                  <a:lnTo>
-                    <a:pt x="2296227" y="2786767"/>
-                  </a:lnTo>
-                  <a:lnTo>
-                    <a:pt x="2367850" y="2795939"/>
-                  </a:lnTo>
-                  <a:lnTo>
-                    <a:pt x="2439472" y="2804990"/>
-                  </a:lnTo>
-                  <a:lnTo>
-                    <a:pt x="2511095" y="2813922"/>
-                  </a:lnTo>
-                  <a:lnTo>
-                    <a:pt x="2582717" y="2822737"/>
-                  </a:lnTo>
-                  <a:lnTo>
-                    <a:pt x="2654340" y="2831436"/>
-                  </a:lnTo>
-                  <a:lnTo>
-                    <a:pt x="2725962" y="2840020"/>
-                  </a:lnTo>
-                  <a:lnTo>
-                    <a:pt x="2797585" y="2848492"/>
-                  </a:lnTo>
-                  <a:lnTo>
-                    <a:pt x="2869207" y="2856852"/>
-                  </a:lnTo>
-                  <a:lnTo>
-                    <a:pt x="2940830" y="2865101"/>
-                  </a:lnTo>
-                  <a:lnTo>
-                    <a:pt x="3012452" y="2873243"/>
-                  </a:lnTo>
-                  <a:lnTo>
-                    <a:pt x="3084075" y="2881277"/>
-                  </a:lnTo>
-                  <a:lnTo>
-                    <a:pt x="3155698" y="2889205"/>
-                  </a:lnTo>
-                  <a:lnTo>
-                    <a:pt x="3227320" y="2897029"/>
-                  </a:lnTo>
-                  <a:lnTo>
-                    <a:pt x="3298943" y="2904750"/>
-                  </a:lnTo>
-                  <a:lnTo>
-                    <a:pt x="3370565" y="2912370"/>
-                  </a:lnTo>
-                  <a:lnTo>
-                    <a:pt x="3442188" y="2919889"/>
-                  </a:lnTo>
-                  <a:lnTo>
-                    <a:pt x="3513810" y="2927310"/>
-                  </a:lnTo>
-                  <a:lnTo>
-                    <a:pt x="3585433" y="2934632"/>
-                  </a:lnTo>
-                  <a:lnTo>
-                    <a:pt x="3657055" y="2941858"/>
-                  </a:lnTo>
-                  <a:lnTo>
-                    <a:pt x="3728678" y="2948990"/>
-                  </a:lnTo>
-                  <a:lnTo>
-                    <a:pt x="3800300" y="2956027"/>
-                  </a:lnTo>
-                  <a:lnTo>
-                    <a:pt x="3871923" y="2962972"/>
-                  </a:lnTo>
-                  <a:lnTo>
-                    <a:pt x="3943545" y="2969825"/>
-                  </a:lnTo>
-                  <a:lnTo>
-                    <a:pt x="4015168" y="2976588"/>
-                  </a:lnTo>
-                  <a:lnTo>
-                    <a:pt x="4086790" y="2983262"/>
-                  </a:lnTo>
-                  <a:lnTo>
-                    <a:pt x="4158413" y="2989849"/>
-                  </a:lnTo>
-                  <a:lnTo>
-                    <a:pt x="4230035" y="2996348"/>
-                  </a:lnTo>
-                  <a:lnTo>
-                    <a:pt x="4301658" y="3002762"/>
-                  </a:lnTo>
-                  <a:lnTo>
-                    <a:pt x="4373280" y="3009092"/>
-                  </a:lnTo>
-                  <a:lnTo>
-                    <a:pt x="4444903" y="3015338"/>
-                  </a:lnTo>
-                  <a:lnTo>
-                    <a:pt x="4516526" y="3021503"/>
-                  </a:lnTo>
-                  <a:lnTo>
-                    <a:pt x="4588148" y="3027586"/>
-                  </a:lnTo>
-                  <a:lnTo>
-                    <a:pt x="4659771" y="3033589"/>
-                  </a:lnTo>
-                  <a:lnTo>
-                    <a:pt x="4731393" y="3039513"/>
-                  </a:lnTo>
-                  <a:lnTo>
-                    <a:pt x="4803016" y="3045359"/>
-                  </a:lnTo>
-                  <a:lnTo>
-                    <a:pt x="4874638" y="3051128"/>
-                  </a:lnTo>
-                  <a:lnTo>
-                    <a:pt x="4946261" y="3056821"/>
-                  </a:lnTo>
-                  <a:lnTo>
-                    <a:pt x="5017883" y="3062439"/>
-                  </a:lnTo>
-                  <a:lnTo>
-                    <a:pt x="5089506" y="3067984"/>
-                  </a:lnTo>
-                  <a:lnTo>
-                    <a:pt x="5161128" y="3073455"/>
-                  </a:lnTo>
-                  <a:lnTo>
-                    <a:pt x="5232751" y="3078854"/>
-                  </a:lnTo>
-                  <a:lnTo>
-                    <a:pt x="5304373" y="3084183"/>
+                    <a:pt x="12867" y="48285"/>
+                  </a:lnTo>
+                  <a:lnTo>
+                    <a:pt x="84489" y="297550"/>
+                  </a:lnTo>
+                  <a:lnTo>
+                    <a:pt x="156112" y="528729"/>
+                  </a:lnTo>
+                  <a:lnTo>
+                    <a:pt x="227734" y="743135"/>
+                  </a:lnTo>
+                  <a:lnTo>
+                    <a:pt x="299357" y="941984"/>
+                  </a:lnTo>
+                  <a:lnTo>
+                    <a:pt x="370979" y="1126406"/>
+                  </a:lnTo>
+                  <a:lnTo>
+                    <a:pt x="442602" y="1297446"/>
+                  </a:lnTo>
+                  <a:lnTo>
+                    <a:pt x="514224" y="1456077"/>
+                  </a:lnTo>
+                  <a:lnTo>
+                    <a:pt x="585847" y="1603197"/>
+                  </a:lnTo>
+                  <a:lnTo>
+                    <a:pt x="657470" y="1739643"/>
+                  </a:lnTo>
+                  <a:lnTo>
+                    <a:pt x="729092" y="1866189"/>
+                  </a:lnTo>
+                  <a:lnTo>
+                    <a:pt x="800715" y="1983554"/>
+                  </a:lnTo>
+                  <a:lnTo>
+                    <a:pt x="872337" y="2092403"/>
+                  </a:lnTo>
+                  <a:lnTo>
+                    <a:pt x="943960" y="2193354"/>
+                  </a:lnTo>
+                  <a:lnTo>
+                    <a:pt x="1015582" y="2286980"/>
+                  </a:lnTo>
+                  <a:lnTo>
+                    <a:pt x="1087205" y="2373813"/>
+                  </a:lnTo>
+                  <a:lnTo>
+                    <a:pt x="1158827" y="2454346"/>
+                  </a:lnTo>
+                  <a:lnTo>
+                    <a:pt x="1230450" y="2529036"/>
+                  </a:lnTo>
+                  <a:lnTo>
+                    <a:pt x="1302072" y="2598306"/>
+                  </a:lnTo>
+                  <a:lnTo>
+                    <a:pt x="1373695" y="2655738"/>
+                  </a:lnTo>
+                  <a:lnTo>
+                    <a:pt x="1445317" y="2666595"/>
+                  </a:lnTo>
+                  <a:lnTo>
+                    <a:pt x="1516940" y="2677311"/>
+                  </a:lnTo>
+                  <a:lnTo>
+                    <a:pt x="1588562" y="2687886"/>
+                  </a:lnTo>
+                  <a:lnTo>
+                    <a:pt x="1660185" y="2698322"/>
+                  </a:lnTo>
+                  <a:lnTo>
+                    <a:pt x="1731807" y="2708621"/>
+                  </a:lnTo>
+                  <a:lnTo>
+                    <a:pt x="1803430" y="2718785"/>
+                  </a:lnTo>
+                  <a:lnTo>
+                    <a:pt x="1875052" y="2728816"/>
+                  </a:lnTo>
+                  <a:lnTo>
+                    <a:pt x="1946675" y="2738716"/>
+                  </a:lnTo>
+                  <a:lnTo>
+                    <a:pt x="2018298" y="2748485"/>
+                  </a:lnTo>
+                  <a:lnTo>
+                    <a:pt x="2089920" y="2758127"/>
+                  </a:lnTo>
+                  <a:lnTo>
+                    <a:pt x="2161543" y="2767642"/>
+                  </a:lnTo>
+                  <a:lnTo>
+                    <a:pt x="2233165" y="2777032"/>
+                  </a:lnTo>
+                  <a:lnTo>
+                    <a:pt x="2304788" y="2786299"/>
+                  </a:lnTo>
+                  <a:lnTo>
+                    <a:pt x="2376410" y="2795445"/>
+                  </a:lnTo>
+                  <a:lnTo>
+                    <a:pt x="2448033" y="2804471"/>
+                  </a:lnTo>
+                  <a:lnTo>
+                    <a:pt x="2519655" y="2813378"/>
+                  </a:lnTo>
+                  <a:lnTo>
+                    <a:pt x="2591278" y="2822169"/>
+                  </a:lnTo>
+                  <a:lnTo>
+                    <a:pt x="2662900" y="2830844"/>
+                  </a:lnTo>
+                  <a:lnTo>
+                    <a:pt x="2734523" y="2839406"/>
+                  </a:lnTo>
+                  <a:lnTo>
+                    <a:pt x="2806145" y="2847855"/>
+                  </a:lnTo>
+                  <a:lnTo>
+                    <a:pt x="2877768" y="2856193"/>
+                  </a:lnTo>
+                  <a:lnTo>
+                    <a:pt x="2949390" y="2864422"/>
+                  </a:lnTo>
+                  <a:lnTo>
+                    <a:pt x="3021013" y="2872544"/>
+                  </a:lnTo>
+                  <a:lnTo>
+                    <a:pt x="3092635" y="2880558"/>
+                  </a:lnTo>
+                  <a:lnTo>
+                    <a:pt x="3164258" y="2888468"/>
+                  </a:lnTo>
+                  <a:lnTo>
+                    <a:pt x="3235880" y="2896274"/>
+                  </a:lnTo>
+                  <a:lnTo>
+                    <a:pt x="3307503" y="2903977"/>
+                  </a:lnTo>
+                  <a:lnTo>
+                    <a:pt x="3379126" y="2911580"/>
+                  </a:lnTo>
+                  <a:lnTo>
+                    <a:pt x="3450748" y="2919083"/>
+                  </a:lnTo>
+                  <a:lnTo>
+                    <a:pt x="3522371" y="2926487"/>
+                  </a:lnTo>
+                  <a:lnTo>
+                    <a:pt x="3593993" y="2933795"/>
+                  </a:lnTo>
+                  <a:lnTo>
+                    <a:pt x="3665616" y="2941006"/>
+                  </a:lnTo>
+                  <a:lnTo>
+                    <a:pt x="3737238" y="2948123"/>
+                  </a:lnTo>
+                  <a:lnTo>
+                    <a:pt x="3808861" y="2955147"/>
+                  </a:lnTo>
+                  <a:lnTo>
+                    <a:pt x="3880483" y="2962078"/>
+                  </a:lnTo>
+                  <a:lnTo>
+                    <a:pt x="3952106" y="2968919"/>
+                  </a:lnTo>
+                  <a:lnTo>
+                    <a:pt x="4023728" y="2975670"/>
+                  </a:lnTo>
+                  <a:lnTo>
+                    <a:pt x="4095351" y="2982332"/>
+                  </a:lnTo>
+                  <a:lnTo>
+                    <a:pt x="4166973" y="2988907"/>
+                  </a:lnTo>
+                  <a:lnTo>
+                    <a:pt x="4238596" y="2995396"/>
+                  </a:lnTo>
+                  <a:lnTo>
+                    <a:pt x="4310218" y="3001800"/>
+                  </a:lnTo>
+                  <a:lnTo>
+                    <a:pt x="4381841" y="3008120"/>
+                  </a:lnTo>
+                  <a:lnTo>
+                    <a:pt x="4453463" y="3014357"/>
+                  </a:lnTo>
+                  <a:lnTo>
+                    <a:pt x="4525086" y="3020512"/>
+                  </a:lnTo>
+                  <a:lnTo>
+                    <a:pt x="4596708" y="3026586"/>
+                  </a:lnTo>
+                  <a:lnTo>
+                    <a:pt x="4668331" y="3032581"/>
+                  </a:lnTo>
+                  <a:lnTo>
+                    <a:pt x="4739954" y="3038497"/>
+                  </a:lnTo>
+                  <a:lnTo>
+                    <a:pt x="4811576" y="3044336"/>
+                  </a:lnTo>
+                  <a:lnTo>
+                    <a:pt x="4883199" y="3050098"/>
+                  </a:lnTo>
+                  <a:lnTo>
+                    <a:pt x="4954821" y="3055784"/>
+                  </a:lnTo>
+                  <a:lnTo>
+                    <a:pt x="5026444" y="3061396"/>
+                  </a:lnTo>
+                  <a:lnTo>
+                    <a:pt x="5098066" y="3066934"/>
+                  </a:lnTo>
+                  <a:lnTo>
+                    <a:pt x="5169689" y="3072400"/>
+                  </a:lnTo>
+                  <a:lnTo>
+                    <a:pt x="5241311" y="3077794"/>
+                  </a:lnTo>
+                  <a:lnTo>
+                    <a:pt x="5312934" y="3083117"/>
                   </a:lnTo>
                 </a:path>
               </a:pathLst>
@@ -4201,309 +4201,309 @@
           </p:nvSpPr>
           <p:spPr>
             <a:xfrm>
-              <a:off x="1172049" y="4074211"/>
-              <a:ext cx="7090630" cy="1470359"/>
+              <a:off x="1172049" y="4077225"/>
+              <a:ext cx="7090630" cy="1466985"/>
             </a:xfrm>
             <a:custGeom>
               <a:avLst/>
               <a:pathLst>
-                <a:path w="7090630" h="1470359">
+                <a:path w="7090630" h="1466985">
                   <a:moveTo>
-                    <a:pt x="7090630" y="1470359"/>
+                    <a:pt x="7090630" y="1466985"/>
                   </a:moveTo>
                   <a:lnTo>
-                    <a:pt x="7019007" y="1469360"/>
-                  </a:lnTo>
-                  <a:lnTo>
-                    <a:pt x="6947385" y="1468283"/>
-                  </a:lnTo>
-                  <a:lnTo>
-                    <a:pt x="6875762" y="1467121"/>
-                  </a:lnTo>
-                  <a:lnTo>
-                    <a:pt x="6804139" y="1465867"/>
-                  </a:lnTo>
-                  <a:lnTo>
-                    <a:pt x="6732517" y="1464514"/>
-                  </a:lnTo>
-                  <a:lnTo>
-                    <a:pt x="6660894" y="1463055"/>
-                  </a:lnTo>
-                  <a:lnTo>
-                    <a:pt x="6589272" y="1461481"/>
-                  </a:lnTo>
-                  <a:lnTo>
-                    <a:pt x="6517649" y="1459782"/>
-                  </a:lnTo>
-                  <a:lnTo>
-                    <a:pt x="6446027" y="1457950"/>
-                  </a:lnTo>
-                  <a:lnTo>
-                    <a:pt x="6374404" y="1455974"/>
-                  </a:lnTo>
-                  <a:lnTo>
-                    <a:pt x="6302782" y="1453842"/>
-                  </a:lnTo>
-                  <a:lnTo>
-                    <a:pt x="6231159" y="1451542"/>
-                  </a:lnTo>
-                  <a:lnTo>
-                    <a:pt x="6159537" y="1449061"/>
-                  </a:lnTo>
-                  <a:lnTo>
-                    <a:pt x="6087914" y="1446384"/>
-                  </a:lnTo>
-                  <a:lnTo>
-                    <a:pt x="6016292" y="1443497"/>
-                  </a:lnTo>
-                  <a:lnTo>
-                    <a:pt x="5944669" y="1440382"/>
-                  </a:lnTo>
-                  <a:lnTo>
-                    <a:pt x="5873047" y="1437022"/>
-                  </a:lnTo>
-                  <a:lnTo>
-                    <a:pt x="5801424" y="1433397"/>
-                  </a:lnTo>
-                  <a:lnTo>
-                    <a:pt x="5729802" y="1429486"/>
-                  </a:lnTo>
-                  <a:lnTo>
-                    <a:pt x="5658179" y="1425267"/>
-                  </a:lnTo>
-                  <a:lnTo>
-                    <a:pt x="5586557" y="1420716"/>
-                  </a:lnTo>
-                  <a:lnTo>
-                    <a:pt x="5514934" y="1415807"/>
-                  </a:lnTo>
-                  <a:lnTo>
-                    <a:pt x="5443311" y="1410511"/>
-                  </a:lnTo>
-                  <a:lnTo>
-                    <a:pt x="5371689" y="1404797"/>
-                  </a:lnTo>
-                  <a:lnTo>
-                    <a:pt x="5300066" y="1398634"/>
-                  </a:lnTo>
-                  <a:lnTo>
-                    <a:pt x="5228444" y="1391985"/>
-                  </a:lnTo>
-                  <a:lnTo>
-                    <a:pt x="5156821" y="1384812"/>
-                  </a:lnTo>
-                  <a:lnTo>
-                    <a:pt x="5085199" y="1377074"/>
-                  </a:lnTo>
-                  <a:lnTo>
-                    <a:pt x="5013576" y="1368727"/>
-                  </a:lnTo>
-                  <a:lnTo>
-                    <a:pt x="4941954" y="1359722"/>
-                  </a:lnTo>
-                  <a:lnTo>
-                    <a:pt x="4870331" y="1350007"/>
-                  </a:lnTo>
-                  <a:lnTo>
-                    <a:pt x="4798709" y="1339528"/>
-                  </a:lnTo>
-                  <a:lnTo>
-                    <a:pt x="4727086" y="1328223"/>
-                  </a:lnTo>
-                  <a:lnTo>
-                    <a:pt x="4655464" y="1316027"/>
-                  </a:lnTo>
-                  <a:lnTo>
-                    <a:pt x="4583841" y="1302871"/>
-                  </a:lnTo>
-                  <a:lnTo>
-                    <a:pt x="4512219" y="1288678"/>
-                  </a:lnTo>
-                  <a:lnTo>
-                    <a:pt x="4440596" y="1273367"/>
-                  </a:lnTo>
-                  <a:lnTo>
-                    <a:pt x="4368974" y="1256850"/>
-                  </a:lnTo>
-                  <a:lnTo>
-                    <a:pt x="4297351" y="1239031"/>
-                  </a:lnTo>
-                  <a:lnTo>
-                    <a:pt x="4225729" y="1219810"/>
-                  </a:lnTo>
-                  <a:lnTo>
-                    <a:pt x="4154106" y="1199074"/>
-                  </a:lnTo>
-                  <a:lnTo>
-                    <a:pt x="4082483" y="1176704"/>
-                  </a:lnTo>
-                  <a:lnTo>
-                    <a:pt x="4010861" y="1152572"/>
-                  </a:lnTo>
-                  <a:lnTo>
-                    <a:pt x="3939238" y="1126540"/>
-                  </a:lnTo>
-                  <a:lnTo>
-                    <a:pt x="3867616" y="1098456"/>
-                  </a:lnTo>
-                  <a:lnTo>
-                    <a:pt x="3795993" y="1068160"/>
-                  </a:lnTo>
-                  <a:lnTo>
-                    <a:pt x="3724371" y="1035478"/>
-                  </a:lnTo>
-                  <a:lnTo>
-                    <a:pt x="3652748" y="1000221"/>
-                  </a:lnTo>
-                  <a:lnTo>
-                    <a:pt x="3581126" y="962187"/>
-                  </a:lnTo>
-                  <a:lnTo>
-                    <a:pt x="3509503" y="921156"/>
-                  </a:lnTo>
-                  <a:lnTo>
-                    <a:pt x="3437881" y="876893"/>
-                  </a:lnTo>
-                  <a:lnTo>
-                    <a:pt x="3366258" y="829144"/>
-                  </a:lnTo>
-                  <a:lnTo>
-                    <a:pt x="3294636" y="777633"/>
-                  </a:lnTo>
-                  <a:lnTo>
-                    <a:pt x="3223013" y="722064"/>
-                  </a:lnTo>
-                  <a:lnTo>
-                    <a:pt x="3151391" y="662118"/>
-                  </a:lnTo>
-                  <a:lnTo>
-                    <a:pt x="3079768" y="644032"/>
-                  </a:lnTo>
-                  <a:lnTo>
-                    <a:pt x="3008146" y="632844"/>
-                  </a:lnTo>
-                  <a:lnTo>
-                    <a:pt x="2936523" y="621506"/>
-                  </a:lnTo>
-                  <a:lnTo>
-                    <a:pt x="2864901" y="610017"/>
-                  </a:lnTo>
-                  <a:lnTo>
-                    <a:pt x="2793278" y="598375"/>
-                  </a:lnTo>
-                  <a:lnTo>
-                    <a:pt x="2721655" y="586578"/>
-                  </a:lnTo>
-                  <a:lnTo>
-                    <a:pt x="2650033" y="574623"/>
-                  </a:lnTo>
-                  <a:lnTo>
-                    <a:pt x="2578410" y="562509"/>
-                  </a:lnTo>
-                  <a:lnTo>
-                    <a:pt x="2506788" y="550234"/>
-                  </a:lnTo>
-                  <a:lnTo>
-                    <a:pt x="2435165" y="537795"/>
-                  </a:lnTo>
-                  <a:lnTo>
-                    <a:pt x="2363543" y="525189"/>
-                  </a:lnTo>
-                  <a:lnTo>
-                    <a:pt x="2291920" y="512416"/>
-                  </a:lnTo>
-                  <a:lnTo>
-                    <a:pt x="2220298" y="499473"/>
-                  </a:lnTo>
-                  <a:lnTo>
-                    <a:pt x="2148675" y="486356"/>
-                  </a:lnTo>
-                  <a:lnTo>
-                    <a:pt x="2077053" y="473065"/>
-                  </a:lnTo>
-                  <a:lnTo>
-                    <a:pt x="2005430" y="459597"/>
-                  </a:lnTo>
-                  <a:lnTo>
-                    <a:pt x="1933808" y="445949"/>
-                  </a:lnTo>
-                  <a:lnTo>
-                    <a:pt x="1862185" y="432119"/>
-                  </a:lnTo>
-                  <a:lnTo>
-                    <a:pt x="1790563" y="418105"/>
-                  </a:lnTo>
-                  <a:lnTo>
-                    <a:pt x="1718940" y="403903"/>
-                  </a:lnTo>
-                  <a:lnTo>
-                    <a:pt x="1647318" y="389513"/>
-                  </a:lnTo>
-                  <a:lnTo>
-                    <a:pt x="1575695" y="374930"/>
-                  </a:lnTo>
-                  <a:lnTo>
-                    <a:pt x="1504073" y="360153"/>
-                  </a:lnTo>
-                  <a:lnTo>
-                    <a:pt x="1432450" y="345179"/>
-                  </a:lnTo>
-                  <a:lnTo>
-                    <a:pt x="1360827" y="330005"/>
-                  </a:lnTo>
-                  <a:lnTo>
-                    <a:pt x="1289205" y="314629"/>
-                  </a:lnTo>
-                  <a:lnTo>
-                    <a:pt x="1217582" y="299048"/>
-                  </a:lnTo>
-                  <a:lnTo>
-                    <a:pt x="1145960" y="283259"/>
-                  </a:lnTo>
-                  <a:lnTo>
-                    <a:pt x="1074337" y="267260"/>
-                  </a:lnTo>
-                  <a:lnTo>
-                    <a:pt x="1002715" y="251047"/>
-                  </a:lnTo>
-                  <a:lnTo>
-                    <a:pt x="931092" y="234618"/>
-                  </a:lnTo>
-                  <a:lnTo>
-                    <a:pt x="859470" y="217969"/>
-                  </a:lnTo>
-                  <a:lnTo>
-                    <a:pt x="787847" y="201099"/>
-                  </a:lnTo>
-                  <a:lnTo>
-                    <a:pt x="716225" y="184004"/>
-                  </a:lnTo>
-                  <a:lnTo>
-                    <a:pt x="644602" y="166681"/>
-                  </a:lnTo>
-                  <a:lnTo>
-                    <a:pt x="572980" y="149127"/>
-                  </a:lnTo>
-                  <a:lnTo>
-                    <a:pt x="501357" y="131339"/>
-                  </a:lnTo>
-                  <a:lnTo>
-                    <a:pt x="429735" y="113313"/>
-                  </a:lnTo>
-                  <a:lnTo>
-                    <a:pt x="358112" y="95048"/>
-                  </a:lnTo>
-                  <a:lnTo>
-                    <a:pt x="286490" y="76538"/>
-                  </a:lnTo>
-                  <a:lnTo>
-                    <a:pt x="214867" y="57782"/>
-                  </a:lnTo>
-                  <a:lnTo>
-                    <a:pt x="143245" y="38776"/>
-                  </a:lnTo>
-                  <a:lnTo>
-                    <a:pt x="71622" y="19516"/>
+                    <a:pt x="7019007" y="1465964"/>
+                  </a:lnTo>
+                  <a:lnTo>
+                    <a:pt x="6947385" y="1464865"/>
+                  </a:lnTo>
+                  <a:lnTo>
+                    <a:pt x="6875762" y="1463679"/>
+                  </a:lnTo>
+                  <a:lnTo>
+                    <a:pt x="6804139" y="1462400"/>
+                  </a:lnTo>
+                  <a:lnTo>
+                    <a:pt x="6732517" y="1461021"/>
+                  </a:lnTo>
+                  <a:lnTo>
+                    <a:pt x="6660894" y="1459534"/>
+                  </a:lnTo>
+                  <a:lnTo>
+                    <a:pt x="6589272" y="1457931"/>
+                  </a:lnTo>
+                  <a:lnTo>
+                    <a:pt x="6517649" y="1456203"/>
+                  </a:lnTo>
+                  <a:lnTo>
+                    <a:pt x="6446027" y="1454339"/>
+                  </a:lnTo>
+                  <a:lnTo>
+                    <a:pt x="6374404" y="1452330"/>
+                  </a:lnTo>
+                  <a:lnTo>
+                    <a:pt x="6302782" y="1450164"/>
+                  </a:lnTo>
+                  <a:lnTo>
+                    <a:pt x="6231159" y="1447828"/>
+                  </a:lnTo>
+                  <a:lnTo>
+                    <a:pt x="6159537" y="1445309"/>
+                  </a:lnTo>
+                  <a:lnTo>
+                    <a:pt x="6087914" y="1442593"/>
+                  </a:lnTo>
+                  <a:lnTo>
+                    <a:pt x="6016292" y="1439665"/>
+                  </a:lnTo>
+                  <a:lnTo>
+                    <a:pt x="5944669" y="1436507"/>
+                  </a:lnTo>
+                  <a:lnTo>
+                    <a:pt x="5873047" y="1433103"/>
+                  </a:lnTo>
+                  <a:lnTo>
+                    <a:pt x="5801424" y="1429432"/>
+                  </a:lnTo>
+                  <a:lnTo>
+                    <a:pt x="5729802" y="1425474"/>
+                  </a:lnTo>
+                  <a:lnTo>
+                    <a:pt x="5658179" y="1421206"/>
+                  </a:lnTo>
+                  <a:lnTo>
+                    <a:pt x="5586557" y="1416605"/>
+                  </a:lnTo>
+                  <a:lnTo>
+                    <a:pt x="5514934" y="1411643"/>
+                  </a:lnTo>
+                  <a:lnTo>
+                    <a:pt x="5443311" y="1406294"/>
+                  </a:lnTo>
+                  <a:lnTo>
+                    <a:pt x="5371689" y="1400526"/>
+                  </a:lnTo>
+                  <a:lnTo>
+                    <a:pt x="5300066" y="1394306"/>
+                  </a:lnTo>
+                  <a:lnTo>
+                    <a:pt x="5228444" y="1387600"/>
+                  </a:lnTo>
+                  <a:lnTo>
+                    <a:pt x="5156821" y="1380370"/>
+                  </a:lnTo>
+                  <a:lnTo>
+                    <a:pt x="5085199" y="1372574"/>
+                  </a:lnTo>
+                  <a:lnTo>
+                    <a:pt x="5013576" y="1364167"/>
+                  </a:lnTo>
+                  <a:lnTo>
+                    <a:pt x="4941954" y="1355104"/>
+                  </a:lnTo>
+                  <a:lnTo>
+                    <a:pt x="4870331" y="1345331"/>
+                  </a:lnTo>
+                  <a:lnTo>
+                    <a:pt x="4798709" y="1334793"/>
+                  </a:lnTo>
+                  <a:lnTo>
+                    <a:pt x="4727086" y="1323432"/>
+                  </a:lnTo>
+                  <a:lnTo>
+                    <a:pt x="4655464" y="1311181"/>
+                  </a:lnTo>
+                  <a:lnTo>
+                    <a:pt x="4583841" y="1297972"/>
+                  </a:lnTo>
+                  <a:lnTo>
+                    <a:pt x="4512219" y="1283729"/>
+                  </a:lnTo>
+                  <a:lnTo>
+                    <a:pt x="4440596" y="1268373"/>
+                  </a:lnTo>
+                  <a:lnTo>
+                    <a:pt x="4368974" y="1251815"/>
+                  </a:lnTo>
+                  <a:lnTo>
+                    <a:pt x="4297351" y="1233961"/>
+                  </a:lnTo>
+                  <a:lnTo>
+                    <a:pt x="4225729" y="1214711"/>
+                  </a:lnTo>
+                  <a:lnTo>
+                    <a:pt x="4154106" y="1193955"/>
+                  </a:lnTo>
+                  <a:lnTo>
+                    <a:pt x="4082483" y="1171575"/>
+                  </a:lnTo>
+                  <a:lnTo>
+                    <a:pt x="4010861" y="1147444"/>
+                  </a:lnTo>
+                  <a:lnTo>
+                    <a:pt x="3939238" y="1121425"/>
+                  </a:lnTo>
+                  <a:lnTo>
+                    <a:pt x="3867616" y="1093371"/>
+                  </a:lnTo>
+                  <a:lnTo>
+                    <a:pt x="3795993" y="1063122"/>
+                  </a:lnTo>
+                  <a:lnTo>
+                    <a:pt x="3724371" y="1030507"/>
+                  </a:lnTo>
+                  <a:lnTo>
+                    <a:pt x="3652748" y="995340"/>
+                  </a:lnTo>
+                  <a:lnTo>
+                    <a:pt x="3581126" y="957422"/>
+                  </a:lnTo>
+                  <a:lnTo>
+                    <a:pt x="3509503" y="916537"/>
+                  </a:lnTo>
+                  <a:lnTo>
+                    <a:pt x="3437881" y="872454"/>
+                  </a:lnTo>
+                  <a:lnTo>
+                    <a:pt x="3366258" y="824922"/>
+                  </a:lnTo>
+                  <a:lnTo>
+                    <a:pt x="3294636" y="773671"/>
+                  </a:lnTo>
+                  <a:lnTo>
+                    <a:pt x="3223013" y="718411"/>
+                  </a:lnTo>
+                  <a:lnTo>
+                    <a:pt x="3151391" y="658828"/>
+                  </a:lnTo>
+                  <a:lnTo>
+                    <a:pt x="3079768" y="641013"/>
+                  </a:lnTo>
+                  <a:lnTo>
+                    <a:pt x="3008146" y="629865"/>
+                  </a:lnTo>
+                  <a:lnTo>
+                    <a:pt x="2936523" y="618569"/>
+                  </a:lnTo>
+                  <a:lnTo>
+                    <a:pt x="2864901" y="607122"/>
+                  </a:lnTo>
+                  <a:lnTo>
+                    <a:pt x="2793278" y="595524"/>
+                  </a:lnTo>
+                  <a:lnTo>
+                    <a:pt x="2721655" y="583771"/>
+                  </a:lnTo>
+                  <a:lnTo>
+                    <a:pt x="2650033" y="571863"/>
+                  </a:lnTo>
+                  <a:lnTo>
+                    <a:pt x="2578410" y="559796"/>
+                  </a:lnTo>
+                  <a:lnTo>
+                    <a:pt x="2506788" y="547568"/>
+                  </a:lnTo>
+                  <a:lnTo>
+                    <a:pt x="2435165" y="535178"/>
+                  </a:lnTo>
+                  <a:lnTo>
+                    <a:pt x="2363543" y="522624"/>
+                  </a:lnTo>
+                  <a:lnTo>
+                    <a:pt x="2291920" y="509903"/>
+                  </a:lnTo>
+                  <a:lnTo>
+                    <a:pt x="2220298" y="497012"/>
+                  </a:lnTo>
+                  <a:lnTo>
+                    <a:pt x="2148675" y="483951"/>
+                  </a:lnTo>
+                  <a:lnTo>
+                    <a:pt x="2077053" y="470716"/>
+                  </a:lnTo>
+                  <a:lnTo>
+                    <a:pt x="2005430" y="457305"/>
+                  </a:lnTo>
+                  <a:lnTo>
+                    <a:pt x="1933808" y="443716"/>
+                  </a:lnTo>
+                  <a:lnTo>
+                    <a:pt x="1862185" y="429946"/>
+                  </a:lnTo>
+                  <a:lnTo>
+                    <a:pt x="1790563" y="415993"/>
+                  </a:lnTo>
+                  <a:lnTo>
+                    <a:pt x="1718940" y="401855"/>
+                  </a:lnTo>
+                  <a:lnTo>
+                    <a:pt x="1647318" y="387529"/>
+                  </a:lnTo>
+                  <a:lnTo>
+                    <a:pt x="1575695" y="373013"/>
+                  </a:lnTo>
+                  <a:lnTo>
+                    <a:pt x="1504073" y="358304"/>
+                  </a:lnTo>
+                  <a:lnTo>
+                    <a:pt x="1432450" y="343399"/>
+                  </a:lnTo>
+                  <a:lnTo>
+                    <a:pt x="1360827" y="328297"/>
+                  </a:lnTo>
+                  <a:lnTo>
+                    <a:pt x="1289205" y="312993"/>
+                  </a:lnTo>
+                  <a:lnTo>
+                    <a:pt x="1217582" y="297487"/>
+                  </a:lnTo>
+                  <a:lnTo>
+                    <a:pt x="1145960" y="281774"/>
+                  </a:lnTo>
+                  <a:lnTo>
+                    <a:pt x="1074337" y="265852"/>
+                  </a:lnTo>
+                  <a:lnTo>
+                    <a:pt x="1002715" y="249719"/>
+                  </a:lnTo>
+                  <a:lnTo>
+                    <a:pt x="931092" y="233372"/>
+                  </a:lnTo>
+                  <a:lnTo>
+                    <a:pt x="859470" y="216807"/>
+                  </a:lnTo>
+                  <a:lnTo>
+                    <a:pt x="787847" y="200023"/>
+                  </a:lnTo>
+                  <a:lnTo>
+                    <a:pt x="716225" y="183015"/>
+                  </a:lnTo>
+                  <a:lnTo>
+                    <a:pt x="644602" y="165781"/>
+                  </a:lnTo>
+                  <a:lnTo>
+                    <a:pt x="572980" y="148319"/>
+                  </a:lnTo>
+                  <a:lnTo>
+                    <a:pt x="501357" y="130624"/>
+                  </a:lnTo>
+                  <a:lnTo>
+                    <a:pt x="429735" y="112694"/>
+                  </a:lnTo>
+                  <a:lnTo>
+                    <a:pt x="358112" y="94526"/>
+                  </a:lnTo>
+                  <a:lnTo>
+                    <a:pt x="286490" y="76116"/>
+                  </a:lnTo>
+                  <a:lnTo>
+                    <a:pt x="214867" y="57462"/>
+                  </a:lnTo>
+                  <a:lnTo>
+                    <a:pt x="143245" y="38560"/>
+                  </a:lnTo>
+                  <a:lnTo>
+                    <a:pt x="71622" y="19407"/>
                   </a:lnTo>
                   <a:lnTo>
                     <a:pt x="0" y="0"/>
@@ -4526,279 +4526,279 @@
           </p:nvSpPr>
           <p:spPr>
             <a:xfrm>
-              <a:off x="2006189" y="2073503"/>
-              <a:ext cx="6256490" cy="3412570"/>
+              <a:off x="1992104" y="2073503"/>
+              <a:ext cx="6270574" cy="3411470"/>
             </a:xfrm>
             <a:custGeom>
               <a:avLst/>
               <a:pathLst>
-                <a:path w="6256490" h="3412570">
+                <a:path w="6270574" h="3411470">
                   <a:moveTo>
                     <a:pt x="0" y="0"/>
                   </a:moveTo>
                   <a:lnTo>
-                    <a:pt x="25330" y="55224"/>
-                  </a:lnTo>
-                  <a:lnTo>
-                    <a:pt x="96953" y="204570"/>
-                  </a:lnTo>
-                  <a:lnTo>
-                    <a:pt x="168575" y="347410"/>
-                  </a:lnTo>
-                  <a:lnTo>
-                    <a:pt x="240198" y="484028"/>
-                  </a:lnTo>
-                  <a:lnTo>
-                    <a:pt x="311820" y="614696"/>
-                  </a:lnTo>
-                  <a:lnTo>
-                    <a:pt x="383443" y="739671"/>
-                  </a:lnTo>
-                  <a:lnTo>
-                    <a:pt x="455065" y="859203"/>
-                  </a:lnTo>
-                  <a:lnTo>
-                    <a:pt x="526688" y="973527"/>
-                  </a:lnTo>
-                  <a:lnTo>
-                    <a:pt x="598310" y="1082872"/>
-                  </a:lnTo>
-                  <a:lnTo>
-                    <a:pt x="669933" y="1187454"/>
-                  </a:lnTo>
-                  <a:lnTo>
-                    <a:pt x="741555" y="1287480"/>
-                  </a:lnTo>
-                  <a:lnTo>
-                    <a:pt x="813178" y="1383149"/>
-                  </a:lnTo>
-                  <a:lnTo>
-                    <a:pt x="884800" y="1474651"/>
-                  </a:lnTo>
-                  <a:lnTo>
-                    <a:pt x="956423" y="1562167"/>
-                  </a:lnTo>
-                  <a:lnTo>
-                    <a:pt x="1028045" y="1645871"/>
-                  </a:lnTo>
-                  <a:lnTo>
-                    <a:pt x="1099668" y="1725928"/>
-                  </a:lnTo>
-                  <a:lnTo>
-                    <a:pt x="1171290" y="1802498"/>
-                  </a:lnTo>
-                  <a:lnTo>
-                    <a:pt x="1242913" y="1875733"/>
-                  </a:lnTo>
-                  <a:lnTo>
-                    <a:pt x="1314535" y="1945778"/>
-                  </a:lnTo>
-                  <a:lnTo>
-                    <a:pt x="1386158" y="2012772"/>
-                  </a:lnTo>
-                  <a:lnTo>
-                    <a:pt x="1457781" y="2076847"/>
-                  </a:lnTo>
-                  <a:lnTo>
-                    <a:pt x="1529403" y="2138132"/>
-                  </a:lnTo>
-                  <a:lnTo>
-                    <a:pt x="1601026" y="2196746"/>
-                  </a:lnTo>
-                  <a:lnTo>
-                    <a:pt x="1672648" y="2252808"/>
-                  </a:lnTo>
-                  <a:lnTo>
-                    <a:pt x="1744271" y="2306427"/>
-                  </a:lnTo>
-                  <a:lnTo>
-                    <a:pt x="1815893" y="2357711"/>
-                  </a:lnTo>
-                  <a:lnTo>
-                    <a:pt x="1887516" y="2406761"/>
-                  </a:lnTo>
-                  <a:lnTo>
-                    <a:pt x="1959138" y="2453675"/>
-                  </a:lnTo>
-                  <a:lnTo>
-                    <a:pt x="2030761" y="2498544"/>
-                  </a:lnTo>
-                  <a:lnTo>
-                    <a:pt x="2102383" y="2541460"/>
-                  </a:lnTo>
-                  <a:lnTo>
-                    <a:pt x="2174006" y="2582505"/>
-                  </a:lnTo>
-                  <a:lnTo>
-                    <a:pt x="2245628" y="2621763"/>
-                  </a:lnTo>
-                  <a:lnTo>
-                    <a:pt x="2317251" y="2659311"/>
-                  </a:lnTo>
-                  <a:lnTo>
-                    <a:pt x="2388873" y="2695224"/>
-                  </a:lnTo>
-                  <a:lnTo>
-                    <a:pt x="2460496" y="2729571"/>
-                  </a:lnTo>
-                  <a:lnTo>
-                    <a:pt x="2532118" y="2762423"/>
-                  </a:lnTo>
-                  <a:lnTo>
-                    <a:pt x="2603741" y="2793844"/>
-                  </a:lnTo>
-                  <a:lnTo>
-                    <a:pt x="2675363" y="2823896"/>
-                  </a:lnTo>
-                  <a:lnTo>
-                    <a:pt x="2746986" y="2852639"/>
-                  </a:lnTo>
-                  <a:lnTo>
-                    <a:pt x="2818609" y="2880130"/>
-                  </a:lnTo>
-                  <a:lnTo>
-                    <a:pt x="2890231" y="2906423"/>
-                  </a:lnTo>
-                  <a:lnTo>
-                    <a:pt x="2961854" y="2931571"/>
-                  </a:lnTo>
-                  <a:lnTo>
-                    <a:pt x="3033476" y="2955624"/>
-                  </a:lnTo>
-                  <a:lnTo>
-                    <a:pt x="3105099" y="2978629"/>
-                  </a:lnTo>
-                  <a:lnTo>
-                    <a:pt x="3176721" y="3000632"/>
-                  </a:lnTo>
-                  <a:lnTo>
-                    <a:pt x="3248344" y="3021676"/>
-                  </a:lnTo>
-                  <a:lnTo>
-                    <a:pt x="3319966" y="3041804"/>
-                  </a:lnTo>
-                  <a:lnTo>
-                    <a:pt x="3391589" y="3061055"/>
-                  </a:lnTo>
-                  <a:lnTo>
-                    <a:pt x="3463211" y="3079467"/>
-                  </a:lnTo>
-                  <a:lnTo>
-                    <a:pt x="3534834" y="3097078"/>
-                  </a:lnTo>
-                  <a:lnTo>
-                    <a:pt x="3606456" y="3113921"/>
-                  </a:lnTo>
-                  <a:lnTo>
-                    <a:pt x="3678079" y="3130030"/>
-                  </a:lnTo>
-                  <a:lnTo>
-                    <a:pt x="3749701" y="3145438"/>
-                  </a:lnTo>
-                  <a:lnTo>
-                    <a:pt x="3821324" y="3160175"/>
-                  </a:lnTo>
-                  <a:lnTo>
-                    <a:pt x="3892946" y="3174270"/>
-                  </a:lnTo>
-                  <a:lnTo>
-                    <a:pt x="3964569" y="3187750"/>
-                  </a:lnTo>
-                  <a:lnTo>
-                    <a:pt x="4036191" y="3200644"/>
-                  </a:lnTo>
-                  <a:lnTo>
-                    <a:pt x="4107814" y="3212976"/>
-                  </a:lnTo>
-                  <a:lnTo>
-                    <a:pt x="4179437" y="3224771"/>
-                  </a:lnTo>
-                  <a:lnTo>
-                    <a:pt x="4251059" y="3236052"/>
-                  </a:lnTo>
-                  <a:lnTo>
-                    <a:pt x="4322682" y="3246841"/>
-                  </a:lnTo>
-                  <a:lnTo>
-                    <a:pt x="4394304" y="3257161"/>
-                  </a:lnTo>
-                  <a:lnTo>
-                    <a:pt x="4465927" y="3267031"/>
-                  </a:lnTo>
-                  <a:lnTo>
-                    <a:pt x="4537549" y="3276471"/>
-                  </a:lnTo>
-                  <a:lnTo>
-                    <a:pt x="4609172" y="3285500"/>
-                  </a:lnTo>
-                  <a:lnTo>
-                    <a:pt x="4680794" y="3294135"/>
-                  </a:lnTo>
-                  <a:lnTo>
-                    <a:pt x="4752417" y="3302395"/>
-                  </a:lnTo>
-                  <a:lnTo>
-                    <a:pt x="4824039" y="3310294"/>
-                  </a:lnTo>
-                  <a:lnTo>
-                    <a:pt x="4895662" y="3317850"/>
-                  </a:lnTo>
-                  <a:lnTo>
-                    <a:pt x="4967284" y="3325076"/>
-                  </a:lnTo>
-                  <a:lnTo>
-                    <a:pt x="5038907" y="3331988"/>
-                  </a:lnTo>
-                  <a:lnTo>
-                    <a:pt x="5110529" y="3338599"/>
-                  </a:lnTo>
-                  <a:lnTo>
-                    <a:pt x="5182152" y="3344921"/>
-                  </a:lnTo>
-                  <a:lnTo>
-                    <a:pt x="5253774" y="3350968"/>
-                  </a:lnTo>
-                  <a:lnTo>
-                    <a:pt x="5325397" y="3356752"/>
-                  </a:lnTo>
-                  <a:lnTo>
-                    <a:pt x="5397019" y="3362284"/>
-                  </a:lnTo>
-                  <a:lnTo>
-                    <a:pt x="5468642" y="3367575"/>
-                  </a:lnTo>
-                  <a:lnTo>
-                    <a:pt x="5540265" y="3372635"/>
-                  </a:lnTo>
-                  <a:lnTo>
-                    <a:pt x="5611887" y="3377475"/>
-                  </a:lnTo>
-                  <a:lnTo>
-                    <a:pt x="5683510" y="3382104"/>
-                  </a:lnTo>
-                  <a:lnTo>
-                    <a:pt x="5755132" y="3386532"/>
-                  </a:lnTo>
-                  <a:lnTo>
-                    <a:pt x="5826755" y="3390767"/>
-                  </a:lnTo>
-                  <a:lnTo>
-                    <a:pt x="5898377" y="3394817"/>
-                  </a:lnTo>
-                  <a:lnTo>
-                    <a:pt x="5970000" y="3398691"/>
-                  </a:lnTo>
-                  <a:lnTo>
-                    <a:pt x="6041622" y="3402396"/>
-                  </a:lnTo>
-                  <a:lnTo>
-                    <a:pt x="6113245" y="3405939"/>
-                  </a:lnTo>
-                  <a:lnTo>
-                    <a:pt x="6184867" y="3409328"/>
-                  </a:lnTo>
-                  <a:lnTo>
-                    <a:pt x="6256490" y="3412570"/>
+                    <a:pt x="39414" y="84653"/>
+                  </a:lnTo>
+                  <a:lnTo>
+                    <a:pt x="111037" y="231822"/>
+                  </a:lnTo>
+                  <a:lnTo>
+                    <a:pt x="182659" y="372618"/>
+                  </a:lnTo>
+                  <a:lnTo>
+                    <a:pt x="254282" y="507319"/>
+                  </a:lnTo>
+                  <a:lnTo>
+                    <a:pt x="325904" y="636187"/>
+                  </a:lnTo>
+                  <a:lnTo>
+                    <a:pt x="397527" y="759476"/>
+                  </a:lnTo>
+                  <a:lnTo>
+                    <a:pt x="469149" y="877427"/>
+                  </a:lnTo>
+                  <a:lnTo>
+                    <a:pt x="540772" y="990271"/>
+                  </a:lnTo>
+                  <a:lnTo>
+                    <a:pt x="612394" y="1098230"/>
+                  </a:lnTo>
+                  <a:lnTo>
+                    <a:pt x="684017" y="1201514"/>
+                  </a:lnTo>
+                  <a:lnTo>
+                    <a:pt x="755639" y="1300326"/>
+                  </a:lnTo>
+                  <a:lnTo>
+                    <a:pt x="827262" y="1394860"/>
+                  </a:lnTo>
+                  <a:lnTo>
+                    <a:pt x="898885" y="1485301"/>
+                  </a:lnTo>
+                  <a:lnTo>
+                    <a:pt x="970507" y="1571827"/>
+                  </a:lnTo>
+                  <a:lnTo>
+                    <a:pt x="1042130" y="1654606"/>
+                  </a:lnTo>
+                  <a:lnTo>
+                    <a:pt x="1113752" y="1733801"/>
+                  </a:lnTo>
+                  <a:lnTo>
+                    <a:pt x="1185375" y="1809567"/>
+                  </a:lnTo>
+                  <a:lnTo>
+                    <a:pt x="1256997" y="1882053"/>
+                  </a:lnTo>
+                  <a:lnTo>
+                    <a:pt x="1328620" y="1951401"/>
+                  </a:lnTo>
+                  <a:lnTo>
+                    <a:pt x="1400242" y="2017746"/>
+                  </a:lnTo>
+                  <a:lnTo>
+                    <a:pt x="1471865" y="2081218"/>
+                  </a:lnTo>
+                  <a:lnTo>
+                    <a:pt x="1543487" y="2141943"/>
+                  </a:lnTo>
+                  <a:lnTo>
+                    <a:pt x="1615110" y="2200038"/>
+                  </a:lnTo>
+                  <a:lnTo>
+                    <a:pt x="1686732" y="2255618"/>
+                  </a:lnTo>
+                  <a:lnTo>
+                    <a:pt x="1758355" y="2308791"/>
+                  </a:lnTo>
+                  <a:lnTo>
+                    <a:pt x="1829977" y="2359662"/>
+                  </a:lnTo>
+                  <a:lnTo>
+                    <a:pt x="1901600" y="2408331"/>
+                  </a:lnTo>
+                  <a:lnTo>
+                    <a:pt x="1973222" y="2454893"/>
+                  </a:lnTo>
+                  <a:lnTo>
+                    <a:pt x="2044845" y="2499438"/>
+                  </a:lnTo>
+                  <a:lnTo>
+                    <a:pt x="2116467" y="2542055"/>
+                  </a:lnTo>
+                  <a:lnTo>
+                    <a:pt x="2188090" y="2582827"/>
+                  </a:lnTo>
+                  <a:lnTo>
+                    <a:pt x="2259713" y="2621834"/>
+                  </a:lnTo>
+                  <a:lnTo>
+                    <a:pt x="2331335" y="2659151"/>
+                  </a:lnTo>
+                  <a:lnTo>
+                    <a:pt x="2402958" y="2694853"/>
+                  </a:lnTo>
+                  <a:lnTo>
+                    <a:pt x="2474580" y="2729010"/>
+                  </a:lnTo>
+                  <a:lnTo>
+                    <a:pt x="2546203" y="2761687"/>
+                  </a:lnTo>
+                  <a:lnTo>
+                    <a:pt x="2617825" y="2792949"/>
+                  </a:lnTo>
+                  <a:lnTo>
+                    <a:pt x="2689448" y="2822858"/>
+                  </a:lnTo>
+                  <a:lnTo>
+                    <a:pt x="2761070" y="2851472"/>
+                  </a:lnTo>
+                  <a:lnTo>
+                    <a:pt x="2832693" y="2878848"/>
+                  </a:lnTo>
+                  <a:lnTo>
+                    <a:pt x="2904315" y="2905038"/>
+                  </a:lnTo>
+                  <a:lnTo>
+                    <a:pt x="2975938" y="2930094"/>
+                  </a:lnTo>
+                  <a:lnTo>
+                    <a:pt x="3047560" y="2954065"/>
+                  </a:lnTo>
+                  <a:lnTo>
+                    <a:pt x="3119183" y="2976998"/>
+                  </a:lnTo>
+                  <a:lnTo>
+                    <a:pt x="3190805" y="2998938"/>
+                  </a:lnTo>
+                  <a:lnTo>
+                    <a:pt x="3262428" y="3019929"/>
+                  </a:lnTo>
+                  <a:lnTo>
+                    <a:pt x="3334050" y="3040010"/>
+                  </a:lnTo>
+                  <a:lnTo>
+                    <a:pt x="3405673" y="3059223"/>
+                  </a:lnTo>
+                  <a:lnTo>
+                    <a:pt x="3477295" y="3077603"/>
+                  </a:lnTo>
+                  <a:lnTo>
+                    <a:pt x="3548918" y="3095187"/>
+                  </a:lnTo>
+                  <a:lnTo>
+                    <a:pt x="3620541" y="3112011"/>
+                  </a:lnTo>
+                  <a:lnTo>
+                    <a:pt x="3692163" y="3128105"/>
+                  </a:lnTo>
+                  <a:lnTo>
+                    <a:pt x="3763786" y="3143503"/>
+                  </a:lnTo>
+                  <a:lnTo>
+                    <a:pt x="3835408" y="3158235"/>
+                  </a:lnTo>
+                  <a:lnTo>
+                    <a:pt x="3907031" y="3172328"/>
+                  </a:lnTo>
+                  <a:lnTo>
+                    <a:pt x="3978653" y="3185811"/>
+                  </a:lnTo>
+                  <a:lnTo>
+                    <a:pt x="4050276" y="3198711"/>
+                  </a:lnTo>
+                  <a:lnTo>
+                    <a:pt x="4121898" y="3211052"/>
+                  </a:lnTo>
+                  <a:lnTo>
+                    <a:pt x="4193521" y="3222859"/>
+                  </a:lnTo>
+                  <a:lnTo>
+                    <a:pt x="4265143" y="3234154"/>
+                  </a:lnTo>
+                  <a:lnTo>
+                    <a:pt x="4336766" y="3244961"/>
+                  </a:lnTo>
+                  <a:lnTo>
+                    <a:pt x="4408388" y="3255299"/>
+                  </a:lnTo>
+                  <a:lnTo>
+                    <a:pt x="4480011" y="3265190"/>
+                  </a:lnTo>
+                  <a:lnTo>
+                    <a:pt x="4551633" y="3274653"/>
+                  </a:lnTo>
+                  <a:lnTo>
+                    <a:pt x="4623256" y="3283706"/>
+                  </a:lnTo>
+                  <a:lnTo>
+                    <a:pt x="4694878" y="3292367"/>
+                  </a:lnTo>
+                  <a:lnTo>
+                    <a:pt x="4766501" y="3300653"/>
+                  </a:lnTo>
+                  <a:lnTo>
+                    <a:pt x="4838123" y="3308580"/>
+                  </a:lnTo>
+                  <a:lnTo>
+                    <a:pt x="4909746" y="3316164"/>
+                  </a:lnTo>
+                  <a:lnTo>
+                    <a:pt x="4981369" y="3323420"/>
+                  </a:lnTo>
+                  <a:lnTo>
+                    <a:pt x="5052991" y="3330361"/>
+                  </a:lnTo>
+                  <a:lnTo>
+                    <a:pt x="5124614" y="3337002"/>
+                  </a:lnTo>
+                  <a:lnTo>
+                    <a:pt x="5196236" y="3343356"/>
+                  </a:lnTo>
+                  <a:lnTo>
+                    <a:pt x="5267859" y="3349434"/>
+                  </a:lnTo>
+                  <a:lnTo>
+                    <a:pt x="5339481" y="3355250"/>
+                  </a:lnTo>
+                  <a:lnTo>
+                    <a:pt x="5411104" y="3360813"/>
+                  </a:lnTo>
+                  <a:lnTo>
+                    <a:pt x="5482726" y="3366136"/>
+                  </a:lnTo>
+                  <a:lnTo>
+                    <a:pt x="5554349" y="3371228"/>
+                  </a:lnTo>
+                  <a:lnTo>
+                    <a:pt x="5625971" y="3376099"/>
+                  </a:lnTo>
+                  <a:lnTo>
+                    <a:pt x="5697594" y="3380760"/>
+                  </a:lnTo>
+                  <a:lnTo>
+                    <a:pt x="5769216" y="3385219"/>
+                  </a:lnTo>
+                  <a:lnTo>
+                    <a:pt x="5840839" y="3389485"/>
+                  </a:lnTo>
+                  <a:lnTo>
+                    <a:pt x="5912461" y="3393566"/>
+                  </a:lnTo>
+                  <a:lnTo>
+                    <a:pt x="5984084" y="3397471"/>
+                  </a:lnTo>
+                  <a:lnTo>
+                    <a:pt x="6055706" y="3401206"/>
+                  </a:lnTo>
+                  <a:lnTo>
+                    <a:pt x="6127329" y="3404780"/>
+                  </a:lnTo>
+                  <a:lnTo>
+                    <a:pt x="6198951" y="3408199"/>
+                  </a:lnTo>
+                  <a:lnTo>
+                    <a:pt x="6270574" y="3411470"/>
                   </a:lnTo>
                 </a:path>
               </a:pathLst>
@@ -4870,7 +4870,7 @@
           </p:nvSpPr>
           <p:spPr>
             <a:xfrm>
-              <a:off x="4313661" y="2073503"/>
+              <a:off x="4313914" y="2073503"/>
               <a:ext cx="0" cy="3649639"/>
             </a:xfrm>
             <a:custGeom>
@@ -5143,7 +5143,7 @@
           </p:nvSpPr>
           <p:spPr>
             <a:xfrm>
-              <a:off x="1343342" y="5785772"/>
+              <a:off x="1344940" y="5785772"/>
               <a:ext cx="161574" cy="80101"/>
             </a:xfrm>
             <a:prstGeom prst="rect">
@@ -5189,7 +5189,7 @@
           </p:nvSpPr>
           <p:spPr>
             <a:xfrm>
-              <a:off x="2280620" y="5785772"/>
+              <a:off x="2281218" y="5785772"/>
               <a:ext cx="161574" cy="80101"/>
             </a:xfrm>
             <a:prstGeom prst="rect">
@@ -5235,7 +5235,7 @@
           </p:nvSpPr>
           <p:spPr>
             <a:xfrm>
-              <a:off x="3217897" y="5785772"/>
+              <a:off x="3217496" y="5785772"/>
               <a:ext cx="161574" cy="80101"/>
             </a:xfrm>
             <a:prstGeom prst="rect">
@@ -5281,7 +5281,7 @@
           </p:nvSpPr>
           <p:spPr>
             <a:xfrm>
-              <a:off x="4204872" y="5785772"/>
+              <a:off x="4203472" y="5785772"/>
               <a:ext cx="62179" cy="80101"/>
             </a:xfrm>
             <a:prstGeom prst="rect">
@@ -5327,7 +5327,7 @@
           </p:nvSpPr>
           <p:spPr>
             <a:xfrm>
-              <a:off x="5111060" y="5785772"/>
+              <a:off x="5108660" y="5785772"/>
               <a:ext cx="124358" cy="80101"/>
             </a:xfrm>
             <a:prstGeom prst="rect">
@@ -5373,7 +5373,7 @@
           </p:nvSpPr>
           <p:spPr>
             <a:xfrm>
-              <a:off x="6048338" y="5785772"/>
+              <a:off x="6044938" y="5785772"/>
               <a:ext cx="124358" cy="80101"/>
             </a:xfrm>
             <a:prstGeom prst="rect">
@@ -5419,7 +5419,7 @@
           </p:nvSpPr>
           <p:spPr>
             <a:xfrm>
-              <a:off x="6985615" y="5785772"/>
+              <a:off x="6981216" y="5785772"/>
               <a:ext cx="124358" cy="80101"/>
             </a:xfrm>
             <a:prstGeom prst="rect">
@@ -5465,7 +5465,7 @@
           </p:nvSpPr>
           <p:spPr>
             <a:xfrm>
-              <a:off x="7922893" y="5785772"/>
+              <a:off x="7917494" y="5785772"/>
               <a:ext cx="124358" cy="80101"/>
             </a:xfrm>
             <a:prstGeom prst="rect">
@@ -5636,7 +5636,7 @@
                   <a:latin typeface="Helvetica"/>
                   <a:cs typeface="Helvetica"/>
                 </a:rPr>
-                <a:t>subHR per 10 % decline: 1.79 (1.19-2.70), p_Bonf = 0.032 (n = 6)  |  per IQR decline (Δ = 25.8 %): 4.51 (1.56-12.98)  |  IQR: [-10.7, 15.1] %</a:t>
+                <a:t>subHR per 10 % decline: 1.78 (1.19-2.68), p_Bonf = 0.031 (n = 6)  |  per IQR decline (Δ = 25.8 %): 4.45 (1.56-12.69)  |  IQR: [-10.6, 15.2] %</a:t>
               </a:r>
             </a:p>
           </p:txBody>
